--- a/Windrise-创新点与AEG.pptx
+++ b/Windrise-创新点与AEG.pptx
@@ -13,6 +13,7 @@
     <p:sldId id="261" r:id="rId12"/>
     <p:sldId id="262" r:id="rId13"/>
     <p:sldId id="263" r:id="rId14"/>
+    <p:sldId id="264" r:id="rId15"/>
   </p:sldIdLst>
   <p:sldSz cx="12191695" cy="6858000" type="screen4x3"/>
   <p:notesSz cx="6858000" cy="9144000"/>
@@ -6658,7 +6659,7 @@
                 <a:latin typeface="Consolas"/>
                 <a:ea typeface="Consolas"/>
               </a:rPr>
-              <a:t>03 · 机理增强知识图谱</a:t>
+              <a:t>03 · 原理层创新 · 不止工程，更在原理</a:t>
             </a:r>
           </a:p>
         </p:txBody>
@@ -6701,204 +6702,21 @@
                 <a:latin typeface="微软雅黑"/>
                 <a:ea typeface="微软雅黑"/>
               </a:rPr>
-              <a:t>把'故障码是什么'升级为'为什么发生、如何验证'</a:t>
-            </a:r>
-          </a:p>
-        </p:txBody>
-      </p:sp>
-      <p:sp>
-        <p:nvSpPr>
-          <p:cNvPr id="5" name="TextBox 4"/>
-          <p:cNvSpPr txBox="1"/>
-          <p:nvPr/>
-        </p:nvSpPr>
-        <p:spPr>
-          <a:xfrm>
-            <a:off x="822960" y="1828800"/>
-            <a:ext cx="5669280" cy="3291840"/>
-          </a:xfrm>
-          <a:prstGeom prst="rect">
-            <a:avLst/>
-          </a:prstGeom>
-          <a:noFill/>
-        </p:spPr>
-        <p:txBody>
-          <a:bodyPr wrap="square" anchor="t" lIns="0" rIns="0" tIns="0" bIns="0">
-            <a:spAutoFit/>
-          </a:bodyPr>
-          <a:lstStyle/>
-          <a:p>
-            <a:pPr algn="l">
-              <a:lnSpc>
-                <a:spcPct val="125000"/>
-              </a:lnSpc>
-              <a:spcAft>
-                <a:spcPts val="600"/>
-              </a:spcAft>
-            </a:pPr>
-            <a:r>
-              <a:rPr sz="1500" b="1">
-                <a:solidFill>
-                  <a:srgbClr val="35C6BA"/>
-                </a:solidFill>
-                <a:latin typeface="微软雅黑"/>
-                <a:ea typeface="微软雅黑"/>
-              </a:rPr>
-              <a:t>机理推理节点</a:t>
-            </a:r>
-          </a:p>
-          <a:p>
-            <a:pPr algn="l">
-              <a:lnSpc>
-                <a:spcPct val="125000"/>
-              </a:lnSpc>
-              <a:spcAft>
-                <a:spcPts val="600"/>
-              </a:spcAft>
-            </a:pPr>
-            <a:r>
-              <a:rPr sz="1300" b="0">
-                <a:solidFill>
-                  <a:srgbClr val="A6B6C4"/>
-                </a:solidFill>
-                <a:latin typeface="Consolas"/>
-                <a:ea typeface="Consolas"/>
-              </a:rPr>
-              <a:t>mechanism_archetype · failure_mode · propagation_step · observable · verification_test · control_barrier</a:t>
-            </a:r>
-          </a:p>
-          <a:p>
-            <a:pPr algn="l">
-              <a:lnSpc>
-                <a:spcPct val="125000"/>
-              </a:lnSpc>
-              <a:spcAft>
-                <a:spcPts val="600"/>
-              </a:spcAft>
-            </a:pPr>
-            <a:r>
-              <a:rPr sz="600" b="0">
-                <a:solidFill>
-                  <a:srgbClr val="EAF0F5"/>
-                </a:solidFill>
-                <a:latin typeface="微软雅黑"/>
-                <a:ea typeface="微软雅黑"/>
-              </a:rPr>
-              <a:t/>
-            </a:r>
-          </a:p>
-          <a:p>
-            <a:pPr algn="l">
-              <a:lnSpc>
-                <a:spcPct val="125000"/>
-              </a:lnSpc>
-              <a:spcAft>
-                <a:spcPts val="600"/>
-              </a:spcAft>
-            </a:pPr>
-            <a:r>
-              <a:rPr sz="1500" b="1">
-                <a:solidFill>
-                  <a:srgbClr val="35C6BA"/>
-                </a:solidFill>
-                <a:latin typeface="微软雅黑"/>
-                <a:ea typeface="微软雅黑"/>
-              </a:rPr>
-              <a:t>竞争机理判别节点</a:t>
-            </a:r>
-          </a:p>
-          <a:p>
-            <a:pPr algn="l">
-              <a:lnSpc>
-                <a:spcPct val="125000"/>
-              </a:lnSpc>
-              <a:spcAft>
-                <a:spcPts val="600"/>
-              </a:spcAft>
-            </a:pPr>
-            <a:r>
-              <a:rPr sz="1300" b="0">
-                <a:solidFill>
-                  <a:srgbClr val="A6B6C4"/>
-                </a:solidFill>
-                <a:latin typeface="Consolas"/>
-                <a:ea typeface="Consolas"/>
-              </a:rPr>
-              <a:t>diagnostic_hypothesis · discriminating_evidence · counterfactual_test · decision_rule</a:t>
-            </a:r>
-          </a:p>
-          <a:p>
-            <a:pPr algn="l">
-              <a:lnSpc>
-                <a:spcPct val="125000"/>
-              </a:lnSpc>
-              <a:spcAft>
-                <a:spcPts val="600"/>
-              </a:spcAft>
-            </a:pPr>
-            <a:r>
-              <a:rPr sz="600" b="0">
-                <a:solidFill>
-                  <a:srgbClr val="EAF0F5"/>
-                </a:solidFill>
-                <a:latin typeface="微软雅黑"/>
-                <a:ea typeface="微软雅黑"/>
-              </a:rPr>
-              <a:t/>
-            </a:r>
-          </a:p>
-          <a:p>
-            <a:pPr algn="l">
-              <a:lnSpc>
-                <a:spcPct val="125000"/>
-              </a:lnSpc>
-              <a:spcAft>
-                <a:spcPts val="600"/>
-              </a:spcAft>
-            </a:pPr>
-            <a:r>
-              <a:rPr sz="1500" b="1">
-                <a:solidFill>
-                  <a:srgbClr val="EAF0F5"/>
-                </a:solidFill>
-                <a:latin typeface="微软雅黑"/>
-                <a:ea typeface="微软雅黑"/>
-              </a:rPr>
-              <a:t>回答现场真正关心的三问</a:t>
-            </a:r>
-          </a:p>
-          <a:p>
-            <a:pPr algn="l">
-              <a:lnSpc>
-                <a:spcPct val="125000"/>
-              </a:lnSpc>
-              <a:spcAft>
-                <a:spcPts val="600"/>
-              </a:spcAft>
-            </a:pPr>
-            <a:r>
-              <a:rPr sz="1350" b="0">
-                <a:solidFill>
-                  <a:srgbClr val="A6B6C4"/>
-                </a:solidFill>
-                <a:latin typeface="微软雅黑"/>
-                <a:ea typeface="微软雅黑"/>
-              </a:rPr>
-              <a:t>为什么发生？为什么查这个量？如何证根因而非凭经验换件？</a:t>
-            </a:r>
-          </a:p>
-        </p:txBody>
-      </p:sp>
-      <p:sp>
-        <p:nvSpPr>
-          <p:cNvPr id="6" name="Rounded Rectangle 5"/>
+              <a:t>六层能力背后，是四条原理级创新</a:t>
+            </a:r>
+          </a:p>
+        </p:txBody>
+      </p:sp>
+      <p:sp>
+        <p:nvSpPr>
+          <p:cNvPr id="5" name="Rounded Rectangle 4"/>
           <p:cNvSpPr/>
           <p:nvPr/>
         </p:nvSpPr>
         <p:spPr>
           <a:xfrm>
-            <a:off x="6858000" y="1874519"/>
-            <a:ext cx="1417320" cy="1097280"/>
+            <a:off x="822960" y="1965960"/>
+            <a:ext cx="5166360" cy="1874519"/>
           </a:xfrm>
           <a:prstGeom prst="roundRect">
             <a:avLst/>
@@ -6937,14 +6755,58 @@
       </p:sp>
       <p:sp>
         <p:nvSpPr>
+          <p:cNvPr id="6" name="Rectangle 5"/>
+          <p:cNvSpPr/>
+          <p:nvPr/>
+        </p:nvSpPr>
+        <p:spPr>
+          <a:xfrm>
+            <a:off x="822960" y="1965960"/>
+            <a:ext cx="54864" cy="1874519"/>
+          </a:xfrm>
+          <a:prstGeom prst="rect">
+            <a:avLst/>
+          </a:prstGeom>
+          <a:solidFill>
+            <a:srgbClr val="35C6BA"/>
+          </a:solidFill>
+          <a:ln>
+            <a:noFill/>
+          </a:ln>
+          <a:effectLst/>
+        </p:spPr>
+        <p:style>
+          <a:lnRef idx="1">
+            <a:schemeClr val="accent1"/>
+          </a:lnRef>
+          <a:fillRef idx="3">
+            <a:schemeClr val="accent1"/>
+          </a:fillRef>
+          <a:effectRef idx="2">
+            <a:schemeClr val="accent1"/>
+          </a:effectRef>
+          <a:fontRef idx="minor">
+            <a:schemeClr val="lt1"/>
+          </a:fontRef>
+        </p:style>
+        <p:txBody>
+          <a:bodyPr rtlCol="0" anchor="ctr"/>
+          <a:lstStyle/>
+          <a:p>
+            <a:pPr algn="ctr"/>
+          </a:p>
+        </p:txBody>
+      </p:sp>
+      <p:sp>
+        <p:nvSpPr>
           <p:cNvPr id="7" name="TextBox 6"/>
           <p:cNvSpPr txBox="1"/>
           <p:nvPr/>
         </p:nvSpPr>
         <p:spPr>
           <a:xfrm>
-            <a:off x="6858000" y="2057400"/>
-            <a:ext cx="1417320" cy="502920"/>
+            <a:off x="1097280" y="2148840"/>
+            <a:ext cx="4663440" cy="365760"/>
           </a:xfrm>
           <a:prstGeom prst="rect">
             <a:avLst/>
@@ -6957,7 +6819,7 @@
           </a:bodyPr>
           <a:lstStyle/>
           <a:p>
-            <a:pPr algn="ctr">
+            <a:pPr algn="l">
               <a:lnSpc>
                 <a:spcPct val="100000"/>
               </a:lnSpc>
@@ -6966,14 +6828,14 @@
               </a:spcAft>
             </a:pPr>
             <a:r>
-              <a:rPr sz="2300" b="1">
-                <a:solidFill>
-                  <a:srgbClr val="35C6BA"/>
-                </a:solidFill>
-                <a:latin typeface="Consolas"/>
-                <a:ea typeface="Consolas"/>
+              <a:rPr sz="1700" b="1">
+                <a:solidFill>
+                  <a:srgbClr val="EAF0F5"/>
+                </a:solidFill>
+                <a:latin typeface="微软雅黑"/>
+                <a:ea typeface="微软雅黑"/>
               </a:rPr>
-              <a:t>6</a:t>
+              <a:t>信息论消歧</a:t>
             </a:r>
           </a:p>
         </p:txBody>
@@ -6986,8 +6848,8 @@
         </p:nvSpPr>
         <p:spPr>
           <a:xfrm>
-            <a:off x="6858000" y="2587752"/>
-            <a:ext cx="1417320" cy="320040"/>
+            <a:off x="1097280" y="2569464"/>
+            <a:ext cx="4663440" cy="502920"/>
           </a:xfrm>
           <a:prstGeom prst="rect">
             <a:avLst/>
@@ -7000,37 +6862,80 @@
           </a:bodyPr>
           <a:lstStyle/>
           <a:p>
-            <a:pPr algn="ctr">
+            <a:pPr algn="l">
               <a:lnSpc>
-                <a:spcPct val="100000"/>
+                <a:spcPct val="110000"/>
               </a:lnSpc>
               <a:spcAft>
                 <a:spcPts val="400"/>
               </a:spcAft>
             </a:pPr>
             <a:r>
-              <a:rPr sz="1150" b="0">
-                <a:solidFill>
-                  <a:srgbClr val="A6B6C4"/>
+              <a:rPr sz="1200" b="1">
+                <a:solidFill>
+                  <a:srgbClr val="35C6BA"/>
                 </a:solidFill>
                 <a:latin typeface="微软雅黑"/>
                 <a:ea typeface="微软雅黑"/>
               </a:rPr>
-              <a:t>机理原型</a:t>
-            </a:r>
-          </a:p>
-        </p:txBody>
-      </p:sp>
-      <p:sp>
-        <p:nvSpPr>
-          <p:cNvPr id="9" name="Rounded Rectangle 8"/>
+              <a:t>检索后启发式补救  →  检索前信息论主动门控</a:t>
+            </a:r>
+          </a:p>
+        </p:txBody>
+      </p:sp>
+      <p:sp>
+        <p:nvSpPr>
+          <p:cNvPr id="9" name="TextBox 8"/>
+          <p:cNvSpPr txBox="1"/>
+          <p:nvPr/>
+        </p:nvSpPr>
+        <p:spPr>
+          <a:xfrm>
+            <a:off x="1097280" y="3136391"/>
+            <a:ext cx="4663440" cy="640080"/>
+          </a:xfrm>
+          <a:prstGeom prst="rect">
+            <a:avLst/>
+          </a:prstGeom>
+          <a:noFill/>
+        </p:spPr>
+        <p:txBody>
+          <a:bodyPr wrap="square" anchor="t" lIns="0" rIns="0" tIns="0" bIns="0">
+            <a:spAutoFit/>
+          </a:bodyPr>
+          <a:lstStyle/>
+          <a:p>
+            <a:pPr algn="l">
+              <a:lnSpc>
+                <a:spcPct val="118000"/>
+              </a:lnSpc>
+              <a:spcAft>
+                <a:spcPts val="400"/>
+              </a:spcAft>
+            </a:pPr>
+            <a:r>
+              <a:rPr sz="1200" b="0">
+                <a:solidFill>
+                  <a:srgbClr val="A6B6C4"/>
+                </a:solidFill>
+                <a:latin typeface="微软雅黑"/>
+                <a:ea typeface="微软雅黑"/>
+              </a:rPr>
+              <a:t>把同码异义形式化为含义分布熵 H(c)，用单一可解释标量在检索前量化消歧风险并主动决策。</a:t>
+            </a:r>
+          </a:p>
+        </p:txBody>
+      </p:sp>
+      <p:sp>
+        <p:nvSpPr>
+          <p:cNvPr id="10" name="Rounded Rectangle 9"/>
           <p:cNvSpPr/>
           <p:nvPr/>
         </p:nvSpPr>
         <p:spPr>
           <a:xfrm>
-            <a:off x="8412480" y="1874519"/>
-            <a:ext cx="1417320" cy="1097280"/>
+            <a:off x="6172200" y="1965960"/>
+            <a:ext cx="5166360" cy="1874519"/>
           </a:xfrm>
           <a:prstGeom prst="roundRect">
             <a:avLst/>
@@ -7069,14 +6974,58 @@
       </p:sp>
       <p:sp>
         <p:nvSpPr>
-          <p:cNvPr id="10" name="TextBox 9"/>
+          <p:cNvPr id="11" name="Rectangle 10"/>
+          <p:cNvSpPr/>
+          <p:nvPr/>
+        </p:nvSpPr>
+        <p:spPr>
+          <a:xfrm>
+            <a:off x="6172200" y="1965960"/>
+            <a:ext cx="54864" cy="1874519"/>
+          </a:xfrm>
+          <a:prstGeom prst="rect">
+            <a:avLst/>
+          </a:prstGeom>
+          <a:solidFill>
+            <a:srgbClr val="35C6BA"/>
+          </a:solidFill>
+          <a:ln>
+            <a:noFill/>
+          </a:ln>
+          <a:effectLst/>
+        </p:spPr>
+        <p:style>
+          <a:lnRef idx="1">
+            <a:schemeClr val="accent1"/>
+          </a:lnRef>
+          <a:fillRef idx="3">
+            <a:schemeClr val="accent1"/>
+          </a:fillRef>
+          <a:effectRef idx="2">
+            <a:schemeClr val="accent1"/>
+          </a:effectRef>
+          <a:fontRef idx="minor">
+            <a:schemeClr val="lt1"/>
+          </a:fontRef>
+        </p:style>
+        <p:txBody>
+          <a:bodyPr rtlCol="0" anchor="ctr"/>
+          <a:lstStyle/>
+          <a:p>
+            <a:pPr algn="ctr"/>
+          </a:p>
+        </p:txBody>
+      </p:sp>
+      <p:sp>
+        <p:nvSpPr>
+          <p:cNvPr id="12" name="TextBox 11"/>
           <p:cNvSpPr txBox="1"/>
           <p:nvPr/>
         </p:nvSpPr>
         <p:spPr>
           <a:xfrm>
-            <a:off x="8412480" y="2057400"/>
-            <a:ext cx="1417320" cy="502920"/>
+            <a:off x="6446520" y="2148840"/>
+            <a:ext cx="4663440" cy="365760"/>
           </a:xfrm>
           <a:prstGeom prst="rect">
             <a:avLst/>
@@ -7089,7 +7038,7 @@
           </a:bodyPr>
           <a:lstStyle/>
           <a:p>
-            <a:pPr algn="ctr">
+            <a:pPr algn="l">
               <a:lnSpc>
                 <a:spcPct val="100000"/>
               </a:lnSpc>
@@ -7098,28 +7047,28 @@
               </a:spcAft>
             </a:pPr>
             <a:r>
-              <a:rPr sz="2300" b="1">
-                <a:solidFill>
-                  <a:srgbClr val="35C6BA"/>
-                </a:solidFill>
-                <a:latin typeface="Consolas"/>
-                <a:ea typeface="Consolas"/>
+              <a:rPr sz="1700" b="1">
+                <a:solidFill>
+                  <a:srgbClr val="EAF0F5"/>
+                </a:solidFill>
+                <a:latin typeface="微软雅黑"/>
+                <a:ea typeface="微软雅黑"/>
               </a:rPr>
-              <a:t>1,686</a:t>
-            </a:r>
-          </a:p>
-        </p:txBody>
-      </p:sp>
-      <p:sp>
-        <p:nvSpPr>
-          <p:cNvPr id="11" name="TextBox 10"/>
+              <a:t>故障机理因果化</a:t>
+            </a:r>
+          </a:p>
+        </p:txBody>
+      </p:sp>
+      <p:sp>
+        <p:nvSpPr>
+          <p:cNvPr id="13" name="TextBox 12"/>
           <p:cNvSpPr txBox="1"/>
           <p:nvPr/>
         </p:nvSpPr>
         <p:spPr>
           <a:xfrm>
-            <a:off x="8412480" y="2587752"/>
-            <a:ext cx="1417320" cy="320040"/>
+            <a:off x="6446520" y="2569464"/>
+            <a:ext cx="4663440" cy="502920"/>
           </a:xfrm>
           <a:prstGeom prst="rect">
             <a:avLst/>
@@ -7132,37 +7081,80 @@
           </a:bodyPr>
           <a:lstStyle/>
           <a:p>
-            <a:pPr algn="ctr">
+            <a:pPr algn="l">
               <a:lnSpc>
-                <a:spcPct val="100000"/>
+                <a:spcPct val="110000"/>
               </a:lnSpc>
               <a:spcAft>
                 <a:spcPts val="400"/>
               </a:spcAft>
             </a:pPr>
             <a:r>
-              <a:rPr sz="1150" b="0">
-                <a:solidFill>
-                  <a:srgbClr val="A6B6C4"/>
+              <a:rPr sz="1200" b="1">
+                <a:solidFill>
+                  <a:srgbClr val="35C6BA"/>
                 </a:solidFill>
                 <a:latin typeface="微软雅黑"/>
                 <a:ea typeface="微软雅黑"/>
               </a:rPr>
-              <a:t>机理节点</a:t>
-            </a:r>
-          </a:p>
-        </p:txBody>
-      </p:sp>
-      <p:sp>
-        <p:nvSpPr>
-          <p:cNvPr id="12" name="Rounded Rectangle 11"/>
+              <a:t>“故障码是什么”  →  “为什么发生、该验证哪个量”</a:t>
+            </a:r>
+          </a:p>
+        </p:txBody>
+      </p:sp>
+      <p:sp>
+        <p:nvSpPr>
+          <p:cNvPr id="14" name="TextBox 13"/>
+          <p:cNvSpPr txBox="1"/>
+          <p:nvPr/>
+        </p:nvSpPr>
+        <p:spPr>
+          <a:xfrm>
+            <a:off x="6446520" y="3136391"/>
+            <a:ext cx="4663440" cy="640080"/>
+          </a:xfrm>
+          <a:prstGeom prst="rect">
+            <a:avLst/>
+          </a:prstGeom>
+          <a:noFill/>
+        </p:spPr>
+        <p:txBody>
+          <a:bodyPr wrap="square" anchor="t" lIns="0" rIns="0" tIns="0" bIns="0">
+            <a:spAutoFit/>
+          </a:bodyPr>
+          <a:lstStyle/>
+          <a:p>
+            <a:pPr algn="l">
+              <a:lnSpc>
+                <a:spcPct val="118000"/>
+              </a:lnSpc>
+              <a:spcAft>
+                <a:spcPts val="400"/>
+              </a:spcAft>
+            </a:pPr>
+            <a:r>
+              <a:rPr sz="1200" b="0">
+                <a:solidFill>
+                  <a:srgbClr val="A6B6C4"/>
+                </a:solidFill>
+                <a:latin typeface="微软雅黑"/>
+                <a:ea typeface="微软雅黑"/>
+              </a:rPr>
+              <a:t>机理原型→失效模式→传播路径→可观测量→验证试验→控制屏障，把标签升级为可推理的因果链。</a:t>
+            </a:r>
+          </a:p>
+        </p:txBody>
+      </p:sp>
+      <p:sp>
+        <p:nvSpPr>
+          <p:cNvPr id="15" name="Rounded Rectangle 14"/>
           <p:cNvSpPr/>
           <p:nvPr/>
         </p:nvSpPr>
         <p:spPr>
           <a:xfrm>
-            <a:off x="9966960" y="1874519"/>
-            <a:ext cx="1417320" cy="1097280"/>
+            <a:off x="822960" y="4005072"/>
+            <a:ext cx="5166360" cy="1874519"/>
           </a:xfrm>
           <a:prstGeom prst="roundRect">
             <a:avLst/>
@@ -7201,14 +7193,58 @@
       </p:sp>
       <p:sp>
         <p:nvSpPr>
-          <p:cNvPr id="13" name="TextBox 12"/>
+          <p:cNvPr id="16" name="Rectangle 15"/>
+          <p:cNvSpPr/>
+          <p:nvPr/>
+        </p:nvSpPr>
+        <p:spPr>
+          <a:xfrm>
+            <a:off x="822960" y="4005072"/>
+            <a:ext cx="54864" cy="1874519"/>
+          </a:xfrm>
+          <a:prstGeom prst="rect">
+            <a:avLst/>
+          </a:prstGeom>
+          <a:solidFill>
+            <a:srgbClr val="35C6BA"/>
+          </a:solidFill>
+          <a:ln>
+            <a:noFill/>
+          </a:ln>
+          <a:effectLst/>
+        </p:spPr>
+        <p:style>
+          <a:lnRef idx="1">
+            <a:schemeClr val="accent1"/>
+          </a:lnRef>
+          <a:fillRef idx="3">
+            <a:schemeClr val="accent1"/>
+          </a:fillRef>
+          <a:effectRef idx="2">
+            <a:schemeClr val="accent1"/>
+          </a:effectRef>
+          <a:fontRef idx="minor">
+            <a:schemeClr val="lt1"/>
+          </a:fontRef>
+        </p:style>
+        <p:txBody>
+          <a:bodyPr rtlCol="0" anchor="ctr"/>
+          <a:lstStyle/>
+          <a:p>
+            <a:pPr algn="ctr"/>
+          </a:p>
+        </p:txBody>
+      </p:sp>
+      <p:sp>
+        <p:nvSpPr>
+          <p:cNvPr id="17" name="TextBox 16"/>
           <p:cNvSpPr txBox="1"/>
           <p:nvPr/>
         </p:nvSpPr>
         <p:spPr>
           <a:xfrm>
-            <a:off x="9966960" y="2057400"/>
-            <a:ext cx="1417320" cy="502920"/>
+            <a:off x="1097280" y="4187952"/>
+            <a:ext cx="4663440" cy="365760"/>
           </a:xfrm>
           <a:prstGeom prst="rect">
             <a:avLst/>
@@ -7221,7 +7257,7 @@
           </a:bodyPr>
           <a:lstStyle/>
           <a:p>
-            <a:pPr algn="ctr">
+            <a:pPr algn="l">
               <a:lnSpc>
                 <a:spcPct val="100000"/>
               </a:lnSpc>
@@ -7230,28 +7266,28 @@
               </a:spcAft>
             </a:pPr>
             <a:r>
-              <a:rPr sz="2300" b="1">
-                <a:solidFill>
-                  <a:srgbClr val="35C6BA"/>
-                </a:solidFill>
-                <a:latin typeface="Consolas"/>
-                <a:ea typeface="Consolas"/>
+              <a:rPr sz="1700" b="1">
+                <a:solidFill>
+                  <a:srgbClr val="EAF0F5"/>
+                </a:solidFill>
+                <a:latin typeface="微软雅黑"/>
+                <a:ea typeface="微软雅黑"/>
               </a:rPr>
-              <a:t>2,601</a:t>
-            </a:r>
-          </a:p>
-        </p:txBody>
-      </p:sp>
-      <p:sp>
-        <p:nvSpPr>
-          <p:cNvPr id="14" name="TextBox 13"/>
+              <a:t>反事实可证伪诊断</a:t>
+            </a:r>
+          </a:p>
+        </p:txBody>
+      </p:sp>
+      <p:sp>
+        <p:nvSpPr>
+          <p:cNvPr id="18" name="TextBox 17"/>
           <p:cNvSpPr txBox="1"/>
           <p:nvPr/>
         </p:nvSpPr>
         <p:spPr>
           <a:xfrm>
-            <a:off x="9966960" y="2587752"/>
-            <a:ext cx="1417320" cy="320040"/>
+            <a:off x="1097280" y="4608576"/>
+            <a:ext cx="4663440" cy="502920"/>
           </a:xfrm>
           <a:prstGeom prst="rect">
             <a:avLst/>
@@ -7264,37 +7300,80 @@
           </a:bodyPr>
           <a:lstStyle/>
           <a:p>
-            <a:pPr algn="ctr">
+            <a:pPr algn="l">
               <a:lnSpc>
-                <a:spcPct val="100000"/>
+                <a:spcPct val="110000"/>
               </a:lnSpc>
               <a:spcAft>
                 <a:spcPts val="400"/>
               </a:spcAft>
             </a:pPr>
             <a:r>
-              <a:rPr sz="1150" b="0">
-                <a:solidFill>
-                  <a:srgbClr val="A6B6C4"/>
+              <a:rPr sz="1200" b="1">
+                <a:solidFill>
+                  <a:srgbClr val="35C6BA"/>
                 </a:solidFill>
                 <a:latin typeface="微软雅黑"/>
                 <a:ea typeface="微软雅黑"/>
               </a:rPr>
-              <a:t>机理关系</a:t>
-            </a:r>
-          </a:p>
-        </p:txBody>
-      </p:sp>
-      <p:sp>
-        <p:nvSpPr>
-          <p:cNvPr id="15" name="Rounded Rectangle 14"/>
+              <a:t>凭经验换件试错  →  可证伪的根因判定</a:t>
+            </a:r>
+          </a:p>
+        </p:txBody>
+      </p:sp>
+      <p:sp>
+        <p:nvSpPr>
+          <p:cNvPr id="19" name="TextBox 18"/>
+          <p:cNvSpPr txBox="1"/>
+          <p:nvPr/>
+        </p:nvSpPr>
+        <p:spPr>
+          <a:xfrm>
+            <a:off x="1097280" y="5175504"/>
+            <a:ext cx="4663440" cy="640080"/>
+          </a:xfrm>
+          <a:prstGeom prst="rect">
+            <a:avLst/>
+          </a:prstGeom>
+          <a:noFill/>
+        </p:spPr>
+        <p:txBody>
+          <a:bodyPr wrap="square" anchor="t" lIns="0" rIns="0" tIns="0" bIns="0">
+            <a:spAutoFit/>
+          </a:bodyPr>
+          <a:lstStyle/>
+          <a:p>
+            <a:pPr algn="l">
+              <a:lnSpc>
+                <a:spcPct val="118000"/>
+              </a:lnSpc>
+              <a:spcAft>
+                <a:spcPts val="400"/>
+              </a:spcAft>
+            </a:pPr>
+            <a:r>
+              <a:rPr sz="1200" b="0">
+                <a:solidFill>
+                  <a:srgbClr val="A6B6C4"/>
+                </a:solidFill>
+                <a:latin typeface="微软雅黑"/>
+                <a:ea typeface="微软雅黑"/>
+              </a:rPr>
+              <a:t>机理竞争时给区分证据与反事实试验，把排障纳入证伪逻辑，而非逐个替换零件的试错。</a:t>
+            </a:r>
+          </a:p>
+        </p:txBody>
+      </p:sp>
+      <p:sp>
+        <p:nvSpPr>
+          <p:cNvPr id="20" name="Rounded Rectangle 19"/>
           <p:cNvSpPr/>
           <p:nvPr/>
         </p:nvSpPr>
         <p:spPr>
           <a:xfrm>
-            <a:off x="6858000" y="3154679"/>
-            <a:ext cx="1417320" cy="1097280"/>
+            <a:off x="6172200" y="4005072"/>
+            <a:ext cx="5166360" cy="1874519"/>
           </a:xfrm>
           <a:prstGeom prst="roundRect">
             <a:avLst/>
@@ -7333,14 +7412,58 @@
       </p:sp>
       <p:sp>
         <p:nvSpPr>
-          <p:cNvPr id="16" name="TextBox 15"/>
+          <p:cNvPr id="21" name="Rectangle 20"/>
+          <p:cNvSpPr/>
+          <p:nvPr/>
+        </p:nvSpPr>
+        <p:spPr>
+          <a:xfrm>
+            <a:off x="6172200" y="4005072"/>
+            <a:ext cx="54864" cy="1874519"/>
+          </a:xfrm>
+          <a:prstGeom prst="rect">
+            <a:avLst/>
+          </a:prstGeom>
+          <a:solidFill>
+            <a:srgbClr val="35C6BA"/>
+          </a:solidFill>
+          <a:ln>
+            <a:noFill/>
+          </a:ln>
+          <a:effectLst/>
+        </p:spPr>
+        <p:style>
+          <a:lnRef idx="1">
+            <a:schemeClr val="accent1"/>
+          </a:lnRef>
+          <a:fillRef idx="3">
+            <a:schemeClr val="accent1"/>
+          </a:fillRef>
+          <a:effectRef idx="2">
+            <a:schemeClr val="accent1"/>
+          </a:effectRef>
+          <a:fontRef idx="minor">
+            <a:schemeClr val="lt1"/>
+          </a:fontRef>
+        </p:style>
+        <p:txBody>
+          <a:bodyPr rtlCol="0" anchor="ctr"/>
+          <a:lstStyle/>
+          <a:p>
+            <a:pPr algn="ctr"/>
+          </a:p>
+        </p:txBody>
+      </p:sp>
+      <p:sp>
+        <p:nvSpPr>
+          <p:cNvPr id="22" name="TextBox 21"/>
           <p:cNvSpPr txBox="1"/>
           <p:nvPr/>
         </p:nvSpPr>
         <p:spPr>
           <a:xfrm>
-            <a:off x="6858000" y="3337560"/>
-            <a:ext cx="1417320" cy="502920"/>
+            <a:off x="6446520" y="4187952"/>
+            <a:ext cx="4663440" cy="365760"/>
           </a:xfrm>
           <a:prstGeom prst="rect">
             <a:avLst/>
@@ -7353,7 +7476,7 @@
           </a:bodyPr>
           <a:lstStyle/>
           <a:p>
-            <a:pPr algn="ctr">
+            <a:pPr algn="l">
               <a:lnSpc>
                 <a:spcPct val="100000"/>
               </a:lnSpc>
@@ -7362,28 +7485,28 @@
               </a:spcAft>
             </a:pPr>
             <a:r>
-              <a:rPr sz="2300" b="1">
-                <a:solidFill>
-                  <a:srgbClr val="57C28C"/>
-                </a:solidFill>
-                <a:latin typeface="Consolas"/>
-                <a:ea typeface="Consolas"/>
+              <a:rPr sz="1700" b="1">
+                <a:solidFill>
+                  <a:srgbClr val="EAF0F5"/>
+                </a:solidFill>
+                <a:latin typeface="微软雅黑"/>
+                <a:ea typeface="微软雅黑"/>
               </a:rPr>
-              <a:t>100%</a:t>
-            </a:r>
-          </a:p>
-        </p:txBody>
-      </p:sp>
-      <p:sp>
-        <p:nvSpPr>
-          <p:cNvPr id="17" name="TextBox 16"/>
+              <a:t>可采纳性形式保证</a:t>
+            </a:r>
+          </a:p>
+        </p:txBody>
+      </p:sp>
+      <p:sp>
+        <p:nvSpPr>
+          <p:cNvPr id="23" name="TextBox 22"/>
           <p:cNvSpPr txBox="1"/>
           <p:nvPr/>
         </p:nvSpPr>
         <p:spPr>
           <a:xfrm>
-            <a:off x="6858000" y="3867911"/>
-            <a:ext cx="1417320" cy="320040"/>
+            <a:off x="6446520" y="4608576"/>
+            <a:ext cx="4663440" cy="502920"/>
           </a:xfrm>
           <a:prstGeom prst="rect">
             <a:avLst/>
@@ -7396,83 +7519,37 @@
           </a:bodyPr>
           <a:lstStyle/>
           <a:p>
-            <a:pPr algn="ctr">
+            <a:pPr algn="l">
               <a:lnSpc>
-                <a:spcPct val="100000"/>
+                <a:spcPct val="110000"/>
               </a:lnSpc>
               <a:spcAft>
                 <a:spcPts val="400"/>
               </a:spcAft>
             </a:pPr>
             <a:r>
-              <a:rPr sz="1150" b="0">
-                <a:solidFill>
-                  <a:srgbClr val="A6B6C4"/>
+              <a:rPr sz="1200" b="1">
+                <a:solidFill>
+                  <a:srgbClr val="35C6BA"/>
                 </a:solidFill>
                 <a:latin typeface="微软雅黑"/>
                 <a:ea typeface="微软雅黑"/>
               </a:rPr>
-              <a:t>机理闭环</a:t>
-            </a:r>
-          </a:p>
-        </p:txBody>
-      </p:sp>
-      <p:sp>
-        <p:nvSpPr>
-          <p:cNvPr id="18" name="Rounded Rectangle 17"/>
-          <p:cNvSpPr/>
-          <p:nvPr/>
-        </p:nvSpPr>
-        <p:spPr>
-          <a:xfrm>
-            <a:off x="8412480" y="3154679"/>
-            <a:ext cx="1417320" cy="1097280"/>
-          </a:xfrm>
-          <a:prstGeom prst="roundRect">
-            <a:avLst/>
-          </a:prstGeom>
-          <a:solidFill>
-            <a:srgbClr val="1A2734"/>
-          </a:solidFill>
-          <a:ln w="12700">
-            <a:solidFill>
-              <a:srgbClr val="2A3A48"/>
-            </a:solidFill>
-          </a:ln>
-          <a:effectLst/>
-        </p:spPr>
-        <p:style>
-          <a:lnRef idx="1">
-            <a:schemeClr val="accent1"/>
-          </a:lnRef>
-          <a:fillRef idx="3">
-            <a:schemeClr val="accent1"/>
-          </a:fillRef>
-          <a:effectRef idx="2">
-            <a:schemeClr val="accent1"/>
-          </a:effectRef>
-          <a:fontRef idx="minor">
-            <a:schemeClr val="lt1"/>
-          </a:fontRef>
-        </p:style>
-        <p:txBody>
-          <a:bodyPr rtlCol="0" anchor="ctr"/>
-          <a:lstStyle/>
-          <a:p>
-            <a:pPr algn="ctr"/>
-          </a:p>
-        </p:txBody>
-      </p:sp>
-      <p:sp>
-        <p:nvSpPr>
-          <p:cNvPr id="19" name="TextBox 18"/>
+              <a:t>检索可能放大歧义  →  候选集合恒不放大</a:t>
+            </a:r>
+          </a:p>
+        </p:txBody>
+      </p:sp>
+      <p:sp>
+        <p:nvSpPr>
+          <p:cNvPr id="24" name="TextBox 23"/>
           <p:cNvSpPr txBox="1"/>
           <p:nvPr/>
         </p:nvSpPr>
         <p:spPr>
           <a:xfrm>
-            <a:off x="8412480" y="3337560"/>
-            <a:ext cx="1417320" cy="502920"/>
+            <a:off x="6446520" y="5175504"/>
+            <a:ext cx="4663440" cy="640080"/>
           </a:xfrm>
           <a:prstGeom prst="rect">
             <a:avLst/>
@@ -7485,198 +7562,23 @@
           </a:bodyPr>
           <a:lstStyle/>
           <a:p>
-            <a:pPr algn="ctr">
+            <a:pPr algn="l">
               <a:lnSpc>
-                <a:spcPct val="100000"/>
+                <a:spcPct val="118000"/>
               </a:lnSpc>
               <a:spcAft>
                 <a:spcPts val="400"/>
               </a:spcAft>
             </a:pPr>
             <a:r>
-              <a:rPr sz="2300" b="1">
-                <a:solidFill>
-                  <a:srgbClr val="57C28C"/>
-                </a:solidFill>
-                <a:latin typeface="Consolas"/>
-                <a:ea typeface="Consolas"/>
-              </a:rPr>
-              <a:t>100%</a:t>
-            </a:r>
-          </a:p>
-        </p:txBody>
-      </p:sp>
-      <p:sp>
-        <p:nvSpPr>
-          <p:cNvPr id="20" name="TextBox 19"/>
-          <p:cNvSpPr txBox="1"/>
-          <p:nvPr/>
-        </p:nvSpPr>
-        <p:spPr>
-          <a:xfrm>
-            <a:off x="8412480" y="3867911"/>
-            <a:ext cx="1417320" cy="320040"/>
-          </a:xfrm>
-          <a:prstGeom prst="rect">
-            <a:avLst/>
-          </a:prstGeom>
-          <a:noFill/>
-        </p:spPr>
-        <p:txBody>
-          <a:bodyPr wrap="square" anchor="t" lIns="0" rIns="0" tIns="0" bIns="0">
-            <a:spAutoFit/>
-          </a:bodyPr>
-          <a:lstStyle/>
-          <a:p>
-            <a:pPr algn="ctr">
-              <a:lnSpc>
-                <a:spcPct val="100000"/>
-              </a:lnSpc>
-              <a:spcAft>
-                <a:spcPts val="400"/>
-              </a:spcAft>
-            </a:pPr>
-            <a:r>
-              <a:rPr sz="1150" b="0">
+              <a:rPr sz="1200" b="0">
                 <a:solidFill>
                   <a:srgbClr val="A6B6C4"/>
                 </a:solidFill>
                 <a:latin typeface="微软雅黑"/>
                 <a:ea typeface="微软雅黑"/>
               </a:rPr>
-              <a:t>假设鉴别</a:t>
-            </a:r>
-          </a:p>
-        </p:txBody>
-      </p:sp>
-      <p:sp>
-        <p:nvSpPr>
-          <p:cNvPr id="21" name="Rounded Rectangle 20"/>
-          <p:cNvSpPr/>
-          <p:nvPr/>
-        </p:nvSpPr>
-        <p:spPr>
-          <a:xfrm>
-            <a:off x="9966960" y="3154679"/>
-            <a:ext cx="1417320" cy="1097280"/>
-          </a:xfrm>
-          <a:prstGeom prst="roundRect">
-            <a:avLst/>
-          </a:prstGeom>
-          <a:solidFill>
-            <a:srgbClr val="1A2734"/>
-          </a:solidFill>
-          <a:ln w="12700">
-            <a:solidFill>
-              <a:srgbClr val="2A3A48"/>
-            </a:solidFill>
-          </a:ln>
-          <a:effectLst/>
-        </p:spPr>
-        <p:style>
-          <a:lnRef idx="1">
-            <a:schemeClr val="accent1"/>
-          </a:lnRef>
-          <a:fillRef idx="3">
-            <a:schemeClr val="accent1"/>
-          </a:fillRef>
-          <a:effectRef idx="2">
-            <a:schemeClr val="accent1"/>
-          </a:effectRef>
-          <a:fontRef idx="minor">
-            <a:schemeClr val="lt1"/>
-          </a:fontRef>
-        </p:style>
-        <p:txBody>
-          <a:bodyPr rtlCol="0" anchor="ctr"/>
-          <a:lstStyle/>
-          <a:p>
-            <a:pPr algn="ctr"/>
-          </a:p>
-        </p:txBody>
-      </p:sp>
-      <p:sp>
-        <p:nvSpPr>
-          <p:cNvPr id="22" name="TextBox 21"/>
-          <p:cNvSpPr txBox="1"/>
-          <p:nvPr/>
-        </p:nvSpPr>
-        <p:spPr>
-          <a:xfrm>
-            <a:off x="9966960" y="3337560"/>
-            <a:ext cx="1417320" cy="502920"/>
-          </a:xfrm>
-          <a:prstGeom prst="rect">
-            <a:avLst/>
-          </a:prstGeom>
-          <a:noFill/>
-        </p:spPr>
-        <p:txBody>
-          <a:bodyPr wrap="square" anchor="t" lIns="0" rIns="0" tIns="0" bIns="0">
-            <a:spAutoFit/>
-          </a:bodyPr>
-          <a:lstStyle/>
-          <a:p>
-            <a:pPr algn="ctr">
-              <a:lnSpc>
-                <a:spcPct val="100000"/>
-              </a:lnSpc>
-              <a:spcAft>
-                <a:spcPts val="400"/>
-              </a:spcAft>
-            </a:pPr>
-            <a:r>
-              <a:rPr sz="2300" b="1">
-                <a:solidFill>
-                  <a:srgbClr val="35C6BA"/>
-                </a:solidFill>
-                <a:latin typeface="Consolas"/>
-                <a:ea typeface="Consolas"/>
-              </a:rPr>
-              <a:t>3.0</a:t>
-            </a:r>
-          </a:p>
-        </p:txBody>
-      </p:sp>
-      <p:sp>
-        <p:nvSpPr>
-          <p:cNvPr id="23" name="TextBox 22"/>
-          <p:cNvSpPr txBox="1"/>
-          <p:nvPr/>
-        </p:nvSpPr>
-        <p:spPr>
-          <a:xfrm>
-            <a:off x="9966960" y="3867911"/>
-            <a:ext cx="1417320" cy="320040"/>
-          </a:xfrm>
-          <a:prstGeom prst="rect">
-            <a:avLst/>
-          </a:prstGeom>
-          <a:noFill/>
-        </p:spPr>
-        <p:txBody>
-          <a:bodyPr wrap="square" anchor="t" lIns="0" rIns="0" tIns="0" bIns="0">
-            <a:spAutoFit/>
-          </a:bodyPr>
-          <a:lstStyle/>
-          <a:p>
-            <a:pPr algn="ctr">
-              <a:lnSpc>
-                <a:spcPct val="100000"/>
-              </a:lnSpc>
-              <a:spcAft>
-                <a:spcPts val="400"/>
-              </a:spcAft>
-            </a:pPr>
-            <a:r>
-              <a:rPr sz="1150" b="0">
-                <a:solidFill>
-                  <a:srgbClr val="A6B6C4"/>
-                </a:solidFill>
-                <a:latin typeface="微软雅黑"/>
-                <a:ea typeface="微软雅黑"/>
-              </a:rPr>
-              <a:t>平均路径深度</a:t>
+              <a:t>范围约束下可证 A(q,s) ⊆ F(c) 恒成立：消歧只缩小候选、绝不引入新的歧义来源。</a:t>
             </a:r>
           </a:p>
         </p:txBody>
@@ -7715,8 +7617,8 @@
         </p:nvSpPr>
         <p:spPr>
           <a:xfrm>
-            <a:off x="0" y="0"/>
-            <a:ext cx="12191695" cy="91440"/>
+            <a:off x="822960" y="658368"/>
+            <a:ext cx="292608" cy="27432"/>
           </a:xfrm>
           <a:prstGeom prst="rect">
             <a:avLst/>
@@ -7753,51 +7655,7 @@
       </p:sp>
       <p:sp>
         <p:nvSpPr>
-          <p:cNvPr id="3" name="Rectangle 2"/>
-          <p:cNvSpPr/>
-          <p:nvPr/>
-        </p:nvSpPr>
-        <p:spPr>
-          <a:xfrm>
-            <a:off x="822960" y="658368"/>
-            <a:ext cx="292608" cy="27432"/>
-          </a:xfrm>
-          <a:prstGeom prst="rect">
-            <a:avLst/>
-          </a:prstGeom>
-          <a:solidFill>
-            <a:srgbClr val="35C6BA"/>
-          </a:solidFill>
-          <a:ln>
-            <a:noFill/>
-          </a:ln>
-          <a:effectLst/>
-        </p:spPr>
-        <p:style>
-          <a:lnRef idx="1">
-            <a:schemeClr val="accent1"/>
-          </a:lnRef>
-          <a:fillRef idx="3">
-            <a:schemeClr val="accent1"/>
-          </a:fillRef>
-          <a:effectRef idx="2">
-            <a:schemeClr val="accent1"/>
-          </a:effectRef>
-          <a:fontRef idx="minor">
-            <a:schemeClr val="lt1"/>
-          </a:fontRef>
-        </p:style>
-        <p:txBody>
-          <a:bodyPr rtlCol="0" anchor="ctr"/>
-          <a:lstStyle/>
-          <a:p>
-            <a:pPr algn="ctr"/>
-          </a:p>
-        </p:txBody>
-      </p:sp>
-      <p:sp>
-        <p:nvSpPr>
-          <p:cNvPr id="4" name="TextBox 3"/>
+          <p:cNvPr id="3" name="TextBox 2"/>
           <p:cNvSpPr txBox="1"/>
           <p:nvPr/>
         </p:nvSpPr>
@@ -7833,21 +7691,21 @@
                 <a:latin typeface="Consolas"/>
                 <a:ea typeface="Consolas"/>
               </a:rPr>
-              <a:t>04 · 创新亮点 · 歧义熵门控 AEG</a:t>
-            </a:r>
-          </a:p>
-        </p:txBody>
-      </p:sp>
-      <p:sp>
-        <p:nvSpPr>
-          <p:cNvPr id="5" name="TextBox 4"/>
+              <a:t>04 · 机理增强知识图谱</a:t>
+            </a:r>
+          </a:p>
+        </p:txBody>
+      </p:sp>
+      <p:sp>
+        <p:nvSpPr>
+          <p:cNvPr id="4" name="TextBox 3"/>
           <p:cNvSpPr txBox="1"/>
           <p:nvPr/>
         </p:nvSpPr>
         <p:spPr>
           <a:xfrm>
             <a:off x="822960" y="1005840"/>
-            <a:ext cx="10515600" cy="914400"/>
+            <a:ext cx="10515600" cy="822960"/>
           </a:xfrm>
           <a:prstGeom prst="rect">
             <a:avLst/>
@@ -7869,74 +7727,28 @@
               </a:spcAft>
             </a:pPr>
             <a:r>
-              <a:rPr sz="3000" b="1">
+              <a:rPr sz="2800" b="1">
                 <a:solidFill>
                   <a:srgbClr val="EAF0F5"/>
                 </a:solidFill>
                 <a:latin typeface="微软雅黑"/>
                 <a:ea typeface="微软雅黑"/>
               </a:rPr>
-              <a:t>用信息论在检索前主动预测消歧风险</a:t>
-            </a:r>
-          </a:p>
-        </p:txBody>
-      </p:sp>
-      <p:sp>
-        <p:nvSpPr>
-          <p:cNvPr id="6" name="Rounded Rectangle 5"/>
-          <p:cNvSpPr/>
-          <p:nvPr/>
-        </p:nvSpPr>
-        <p:spPr>
-          <a:xfrm>
-            <a:off x="822960" y="2057400"/>
-            <a:ext cx="10515600" cy="1051560"/>
-          </a:xfrm>
-          <a:prstGeom prst="roundRect">
-            <a:avLst/>
-          </a:prstGeom>
-          <a:solidFill>
-            <a:srgbClr val="223140"/>
-          </a:solidFill>
-          <a:ln w="15240">
-            <a:solidFill>
-              <a:srgbClr val="35C6BA"/>
-            </a:solidFill>
-          </a:ln>
-          <a:effectLst/>
-        </p:spPr>
-        <p:style>
-          <a:lnRef idx="1">
-            <a:schemeClr val="accent1"/>
-          </a:lnRef>
-          <a:fillRef idx="3">
-            <a:schemeClr val="accent1"/>
-          </a:fillRef>
-          <a:effectRef idx="2">
-            <a:schemeClr val="accent1"/>
-          </a:effectRef>
-          <a:fontRef idx="minor">
-            <a:schemeClr val="lt1"/>
-          </a:fontRef>
-        </p:style>
-        <p:txBody>
-          <a:bodyPr rtlCol="0" anchor="ctr"/>
-          <a:lstStyle/>
-          <a:p>
-            <a:pPr algn="ctr"/>
-          </a:p>
-        </p:txBody>
-      </p:sp>
-      <p:sp>
-        <p:nvSpPr>
-          <p:cNvPr id="7" name="TextBox 6"/>
+              <a:t>把'故障码是什么'升级为'为什么发生、如何验证'</a:t>
+            </a:r>
+          </a:p>
+        </p:txBody>
+      </p:sp>
+      <p:sp>
+        <p:nvSpPr>
+          <p:cNvPr id="5" name="TextBox 4"/>
           <p:cNvSpPr txBox="1"/>
           <p:nvPr/>
         </p:nvSpPr>
         <p:spPr>
           <a:xfrm>
-            <a:off x="1188720" y="2212848"/>
-            <a:ext cx="9784080" cy="457200"/>
+            <a:off x="822960" y="1828800"/>
+            <a:ext cx="5669280" cy="3291840"/>
           </a:xfrm>
           <a:prstGeom prst="rect">
             <a:avLst/>
@@ -7951,78 +7763,175 @@
           <a:p>
             <a:pPr algn="l">
               <a:lnSpc>
-                <a:spcPct val="100000"/>
+                <a:spcPct val="125000"/>
               </a:lnSpc>
               <a:spcAft>
-                <a:spcPts val="400"/>
+                <a:spcPts val="600"/>
               </a:spcAft>
             </a:pPr>
             <a:r>
-              <a:rPr sz="2600" b="1">
+              <a:rPr sz="1500" b="1">
                 <a:solidFill>
                   <a:srgbClr val="35C6BA"/>
+                </a:solidFill>
+                <a:latin typeface="微软雅黑"/>
+                <a:ea typeface="微软雅黑"/>
+              </a:rPr>
+              <a:t>机理推理节点</a:t>
+            </a:r>
+          </a:p>
+          <a:p>
+            <a:pPr algn="l">
+              <a:lnSpc>
+                <a:spcPct val="125000"/>
+              </a:lnSpc>
+              <a:spcAft>
+                <a:spcPts val="600"/>
+              </a:spcAft>
+            </a:pPr>
+            <a:r>
+              <a:rPr sz="1300" b="0">
+                <a:solidFill>
+                  <a:srgbClr val="A6B6C4"/>
                 </a:solidFill>
                 <a:latin typeface="Consolas"/>
                 <a:ea typeface="Consolas"/>
               </a:rPr>
-              <a:t>H(c) = − Σ pᵢ · log₂ pᵢ</a:t>
-            </a:r>
-          </a:p>
-        </p:txBody>
-      </p:sp>
-      <p:sp>
-        <p:nvSpPr>
-          <p:cNvPr id="8" name="TextBox 7"/>
-          <p:cNvSpPr txBox="1"/>
-          <p:nvPr/>
-        </p:nvSpPr>
-        <p:spPr>
-          <a:xfrm>
-            <a:off x="1188720" y="2697480"/>
-            <a:ext cx="9784080" cy="365760"/>
-          </a:xfrm>
-          <a:prstGeom prst="rect">
-            <a:avLst/>
-          </a:prstGeom>
-          <a:noFill/>
-        </p:spPr>
-        <p:txBody>
-          <a:bodyPr wrap="square" anchor="t" lIns="0" rIns="0" tIns="0" bIns="0">
-            <a:spAutoFit/>
-          </a:bodyPr>
-          <a:lstStyle/>
+              <a:t>mechanism_archetype · failure_mode · propagation_step · observable · verification_test · control_barrier</a:t>
+            </a:r>
+          </a:p>
           <a:p>
             <a:pPr algn="l">
               <a:lnSpc>
-                <a:spcPct val="100000"/>
+                <a:spcPct val="125000"/>
               </a:lnSpc>
               <a:spcAft>
-                <a:spcPts val="400"/>
+                <a:spcPts val="600"/>
               </a:spcAft>
             </a:pPr>
             <a:r>
-              <a:rPr sz="1350" b="0">
-                <a:solidFill>
-                  <a:srgbClr val="A6B6C4"/>
+              <a:rPr sz="600" b="0">
+                <a:solidFill>
+                  <a:srgbClr val="EAF0F5"/>
                 </a:solidFill>
                 <a:latin typeface="微软雅黑"/>
                 <a:ea typeface="微软雅黑"/>
               </a:rPr>
-              <a:t>pᵢ = 故障码 c 映射到第 i 种含义的概率；H=0 单义直接答，H 越大越该在检索前追问机型。</a:t>
-            </a:r>
-          </a:p>
-        </p:txBody>
-      </p:sp>
-      <p:sp>
-        <p:nvSpPr>
-          <p:cNvPr id="9" name="Rounded Rectangle 8"/>
+              <a:t/>
+            </a:r>
+          </a:p>
+          <a:p>
+            <a:pPr algn="l">
+              <a:lnSpc>
+                <a:spcPct val="125000"/>
+              </a:lnSpc>
+              <a:spcAft>
+                <a:spcPts val="600"/>
+              </a:spcAft>
+            </a:pPr>
+            <a:r>
+              <a:rPr sz="1500" b="1">
+                <a:solidFill>
+                  <a:srgbClr val="35C6BA"/>
+                </a:solidFill>
+                <a:latin typeface="微软雅黑"/>
+                <a:ea typeface="微软雅黑"/>
+              </a:rPr>
+              <a:t>竞争机理判别节点</a:t>
+            </a:r>
+          </a:p>
+          <a:p>
+            <a:pPr algn="l">
+              <a:lnSpc>
+                <a:spcPct val="125000"/>
+              </a:lnSpc>
+              <a:spcAft>
+                <a:spcPts val="600"/>
+              </a:spcAft>
+            </a:pPr>
+            <a:r>
+              <a:rPr sz="1300" b="0">
+                <a:solidFill>
+                  <a:srgbClr val="A6B6C4"/>
+                </a:solidFill>
+                <a:latin typeface="Consolas"/>
+                <a:ea typeface="Consolas"/>
+              </a:rPr>
+              <a:t>diagnostic_hypothesis · discriminating_evidence · counterfactual_test · decision_rule</a:t>
+            </a:r>
+          </a:p>
+          <a:p>
+            <a:pPr algn="l">
+              <a:lnSpc>
+                <a:spcPct val="125000"/>
+              </a:lnSpc>
+              <a:spcAft>
+                <a:spcPts val="600"/>
+              </a:spcAft>
+            </a:pPr>
+            <a:r>
+              <a:rPr sz="600" b="0">
+                <a:solidFill>
+                  <a:srgbClr val="EAF0F5"/>
+                </a:solidFill>
+                <a:latin typeface="微软雅黑"/>
+                <a:ea typeface="微软雅黑"/>
+              </a:rPr>
+              <a:t/>
+            </a:r>
+          </a:p>
+          <a:p>
+            <a:pPr algn="l">
+              <a:lnSpc>
+                <a:spcPct val="125000"/>
+              </a:lnSpc>
+              <a:spcAft>
+                <a:spcPts val="600"/>
+              </a:spcAft>
+            </a:pPr>
+            <a:r>
+              <a:rPr sz="1500" b="1">
+                <a:solidFill>
+                  <a:srgbClr val="EAF0F5"/>
+                </a:solidFill>
+                <a:latin typeface="微软雅黑"/>
+                <a:ea typeface="微软雅黑"/>
+              </a:rPr>
+              <a:t>回答现场真正关心的三问</a:t>
+            </a:r>
+          </a:p>
+          <a:p>
+            <a:pPr algn="l">
+              <a:lnSpc>
+                <a:spcPct val="125000"/>
+              </a:lnSpc>
+              <a:spcAft>
+                <a:spcPts val="600"/>
+              </a:spcAft>
+            </a:pPr>
+            <a:r>
+              <a:rPr sz="1350" b="0">
+                <a:solidFill>
+                  <a:srgbClr val="A6B6C4"/>
+                </a:solidFill>
+                <a:latin typeface="微软雅黑"/>
+                <a:ea typeface="微软雅黑"/>
+              </a:rPr>
+              <a:t>为什么发生？为什么查这个量？如何证根因而非凭经验换件？</a:t>
+            </a:r>
+          </a:p>
+        </p:txBody>
+      </p:sp>
+      <p:sp>
+        <p:nvSpPr>
+          <p:cNvPr id="6" name="Rounded Rectangle 5"/>
           <p:cNvSpPr/>
           <p:nvPr/>
         </p:nvSpPr>
         <p:spPr>
           <a:xfrm>
-            <a:off x="822960" y="3429000"/>
-            <a:ext cx="3429000" cy="2286000"/>
+            <a:off x="6858000" y="1874519"/>
+            <a:ext cx="1417320" cy="1097280"/>
           </a:xfrm>
           <a:prstGeom prst="roundRect">
             <a:avLst/>
@@ -8061,58 +7970,14 @@
       </p:sp>
       <p:sp>
         <p:nvSpPr>
-          <p:cNvPr id="10" name="Rectangle 9"/>
-          <p:cNvSpPr/>
-          <p:nvPr/>
-        </p:nvSpPr>
-        <p:spPr>
-          <a:xfrm>
-            <a:off x="1097280" y="3657600"/>
-            <a:ext cx="457200" cy="54864"/>
-          </a:xfrm>
-          <a:prstGeom prst="rect">
-            <a:avLst/>
-          </a:prstGeom>
-          <a:solidFill>
-            <a:srgbClr val="35C6BA"/>
-          </a:solidFill>
-          <a:ln>
-            <a:noFill/>
-          </a:ln>
-          <a:effectLst/>
-        </p:spPr>
-        <p:style>
-          <a:lnRef idx="1">
-            <a:schemeClr val="accent1"/>
-          </a:lnRef>
-          <a:fillRef idx="3">
-            <a:schemeClr val="accent1"/>
-          </a:fillRef>
-          <a:effectRef idx="2">
-            <a:schemeClr val="accent1"/>
-          </a:effectRef>
-          <a:fontRef idx="minor">
-            <a:schemeClr val="lt1"/>
-          </a:fontRef>
-        </p:style>
-        <p:txBody>
-          <a:bodyPr rtlCol="0" anchor="ctr"/>
-          <a:lstStyle/>
-          <a:p>
-            <a:pPr algn="ctr"/>
-          </a:p>
-        </p:txBody>
-      </p:sp>
-      <p:sp>
-        <p:nvSpPr>
-          <p:cNvPr id="11" name="TextBox 10"/>
+          <p:cNvPr id="7" name="TextBox 6"/>
           <p:cNvSpPr txBox="1"/>
           <p:nvPr/>
         </p:nvSpPr>
         <p:spPr>
           <a:xfrm>
-            <a:off x="1097280" y="3840480"/>
-            <a:ext cx="2880360" cy="640080"/>
+            <a:off x="6858000" y="2057400"/>
+            <a:ext cx="1417320" cy="502920"/>
           </a:xfrm>
           <a:prstGeom prst="rect">
             <a:avLst/>
@@ -8125,37 +7990,37 @@
           </a:bodyPr>
           <a:lstStyle/>
           <a:p>
-            <a:pPr algn="l">
+            <a:pPr algn="ctr">
               <a:lnSpc>
-                <a:spcPct val="105000"/>
+                <a:spcPct val="100000"/>
               </a:lnSpc>
               <a:spcAft>
                 <a:spcPts val="400"/>
               </a:spcAft>
             </a:pPr>
             <a:r>
-              <a:rPr sz="1650" b="1">
-                <a:solidFill>
-                  <a:srgbClr val="EAF0F5"/>
-                </a:solidFill>
-                <a:latin typeface="微软雅黑"/>
-                <a:ea typeface="微软雅黑"/>
+              <a:rPr sz="2300" b="1">
+                <a:solidFill>
+                  <a:srgbClr val="35C6BA"/>
+                </a:solidFill>
+                <a:latin typeface="Consolas"/>
+                <a:ea typeface="Consolas"/>
               </a:rPr>
-              <a:t>被动 → 主动</a:t>
-            </a:r>
-          </a:p>
-        </p:txBody>
-      </p:sp>
-      <p:sp>
-        <p:nvSpPr>
-          <p:cNvPr id="12" name="TextBox 11"/>
+              <a:t>6</a:t>
+            </a:r>
+          </a:p>
+        </p:txBody>
+      </p:sp>
+      <p:sp>
+        <p:nvSpPr>
+          <p:cNvPr id="8" name="TextBox 7"/>
           <p:cNvSpPr txBox="1"/>
           <p:nvPr/>
         </p:nvSpPr>
         <p:spPr>
           <a:xfrm>
-            <a:off x="1097280" y="4572000"/>
-            <a:ext cx="2880360" cy="1051560"/>
+            <a:off x="6858000" y="2587752"/>
+            <a:ext cx="1417320" cy="320040"/>
           </a:xfrm>
           <a:prstGeom prst="rect">
             <a:avLst/>
@@ -8168,37 +8033,37 @@
           </a:bodyPr>
           <a:lstStyle/>
           <a:p>
-            <a:pPr algn="l">
+            <a:pPr algn="ctr">
               <a:lnSpc>
-                <a:spcPct val="120000"/>
+                <a:spcPct val="100000"/>
               </a:lnSpc>
               <a:spcAft>
                 <a:spcPts val="400"/>
               </a:spcAft>
             </a:pPr>
             <a:r>
-              <a:rPr sz="1300" b="0">
+              <a:rPr sz="1150" b="0">
                 <a:solidFill>
                   <a:srgbClr val="A6B6C4"/>
                 </a:solidFill>
                 <a:latin typeface="微软雅黑"/>
                 <a:ea typeface="微软雅黑"/>
               </a:rPr>
-              <a:t>现有做法检索后发现歧义才提示；AEG 在检索之前用一个标量预测风险，主动决定是否追问。</a:t>
-            </a:r>
-          </a:p>
-        </p:txBody>
-      </p:sp>
-      <p:sp>
-        <p:nvSpPr>
-          <p:cNvPr id="13" name="Rounded Rectangle 12"/>
+              <a:t>机理原型</a:t>
+            </a:r>
+          </a:p>
+        </p:txBody>
+      </p:sp>
+      <p:sp>
+        <p:nvSpPr>
+          <p:cNvPr id="9" name="Rounded Rectangle 8"/>
           <p:cNvSpPr/>
           <p:nvPr/>
         </p:nvSpPr>
         <p:spPr>
           <a:xfrm>
-            <a:off x="4434840" y="3429000"/>
-            <a:ext cx="3429000" cy="2286000"/>
+            <a:off x="8412480" y="1874519"/>
+            <a:ext cx="1417320" cy="1097280"/>
           </a:xfrm>
           <a:prstGeom prst="roundRect">
             <a:avLst/>
@@ -8237,58 +8102,14 @@
       </p:sp>
       <p:sp>
         <p:nvSpPr>
-          <p:cNvPr id="14" name="Rectangle 13"/>
-          <p:cNvSpPr/>
-          <p:nvPr/>
-        </p:nvSpPr>
-        <p:spPr>
-          <a:xfrm>
-            <a:off x="4709160" y="3657600"/>
-            <a:ext cx="457200" cy="54864"/>
-          </a:xfrm>
-          <a:prstGeom prst="rect">
-            <a:avLst/>
-          </a:prstGeom>
-          <a:solidFill>
-            <a:srgbClr val="35C6BA"/>
-          </a:solidFill>
-          <a:ln>
-            <a:noFill/>
-          </a:ln>
-          <a:effectLst/>
-        </p:spPr>
-        <p:style>
-          <a:lnRef idx="1">
-            <a:schemeClr val="accent1"/>
-          </a:lnRef>
-          <a:fillRef idx="3">
-            <a:schemeClr val="accent1"/>
-          </a:fillRef>
-          <a:effectRef idx="2">
-            <a:schemeClr val="accent1"/>
-          </a:effectRef>
-          <a:fontRef idx="minor">
-            <a:schemeClr val="lt1"/>
-          </a:fontRef>
-        </p:style>
-        <p:txBody>
-          <a:bodyPr rtlCol="0" anchor="ctr"/>
-          <a:lstStyle/>
-          <a:p>
-            <a:pPr algn="ctr"/>
-          </a:p>
-        </p:txBody>
-      </p:sp>
-      <p:sp>
-        <p:nvSpPr>
-          <p:cNvPr id="15" name="TextBox 14"/>
+          <p:cNvPr id="10" name="TextBox 9"/>
           <p:cNvSpPr txBox="1"/>
           <p:nvPr/>
         </p:nvSpPr>
         <p:spPr>
           <a:xfrm>
-            <a:off x="4709160" y="3840480"/>
-            <a:ext cx="2880360" cy="640080"/>
+            <a:off x="8412480" y="2057400"/>
+            <a:ext cx="1417320" cy="502920"/>
           </a:xfrm>
           <a:prstGeom prst="rect">
             <a:avLst/>
@@ -8301,37 +8122,37 @@
           </a:bodyPr>
           <a:lstStyle/>
           <a:p>
-            <a:pPr algn="l">
+            <a:pPr algn="ctr">
               <a:lnSpc>
-                <a:spcPct val="105000"/>
+                <a:spcPct val="100000"/>
               </a:lnSpc>
               <a:spcAft>
                 <a:spcPts val="400"/>
               </a:spcAft>
             </a:pPr>
             <a:r>
-              <a:rPr sz="1650" b="1">
-                <a:solidFill>
-                  <a:srgbClr val="EAF0F5"/>
-                </a:solidFill>
-                <a:latin typeface="微软雅黑"/>
-                <a:ea typeface="微软雅黑"/>
+              <a:rPr sz="2300" b="1">
+                <a:solidFill>
+                  <a:srgbClr val="35C6BA"/>
+                </a:solidFill>
+                <a:latin typeface="Consolas"/>
+                <a:ea typeface="Consolas"/>
               </a:rPr>
-              <a:t>可量化 · 可设阈值</a:t>
-            </a:r>
-          </a:p>
-        </p:txBody>
-      </p:sp>
-      <p:sp>
-        <p:nvSpPr>
-          <p:cNvPr id="16" name="TextBox 15"/>
+              <a:t>1,686</a:t>
+            </a:r>
+          </a:p>
+        </p:txBody>
+      </p:sp>
+      <p:sp>
+        <p:nvSpPr>
+          <p:cNvPr id="11" name="TextBox 10"/>
           <p:cNvSpPr txBox="1"/>
           <p:nvPr/>
         </p:nvSpPr>
         <p:spPr>
           <a:xfrm>
-            <a:off x="4709160" y="4572000"/>
-            <a:ext cx="2880360" cy="1051560"/>
+            <a:off x="8412480" y="2587752"/>
+            <a:ext cx="1417320" cy="320040"/>
           </a:xfrm>
           <a:prstGeom prst="rect">
             <a:avLst/>
@@ -8344,37 +8165,37 @@
           </a:bodyPr>
           <a:lstStyle/>
           <a:p>
-            <a:pPr algn="l">
+            <a:pPr algn="ctr">
               <a:lnSpc>
-                <a:spcPct val="120000"/>
+                <a:spcPct val="100000"/>
               </a:lnSpc>
               <a:spcAft>
                 <a:spcPts val="400"/>
               </a:spcAft>
             </a:pPr>
             <a:r>
-              <a:rPr sz="1300" b="0">
+              <a:rPr sz="1150" b="0">
                 <a:solidFill>
                   <a:srgbClr val="A6B6C4"/>
                 </a:solidFill>
                 <a:latin typeface="微软雅黑"/>
                 <a:ea typeface="微软雅黑"/>
               </a:rPr>
-              <a:t>阈值 τ 直接对应'追问成本 ↔ 误命中'的帕累托工作点，单一可解释度量便于审核。</a:t>
-            </a:r>
-          </a:p>
-        </p:txBody>
-      </p:sp>
-      <p:sp>
-        <p:nvSpPr>
-          <p:cNvPr id="17" name="Rounded Rectangle 16"/>
+              <a:t>机理节点</a:t>
+            </a:r>
+          </a:p>
+        </p:txBody>
+      </p:sp>
+      <p:sp>
+        <p:nvSpPr>
+          <p:cNvPr id="12" name="Rounded Rectangle 11"/>
           <p:cNvSpPr/>
           <p:nvPr/>
         </p:nvSpPr>
         <p:spPr>
           <a:xfrm>
-            <a:off x="8046720" y="3429000"/>
-            <a:ext cx="3429000" cy="2286000"/>
+            <a:off x="9966960" y="1874519"/>
+            <a:ext cx="1417320" cy="1097280"/>
           </a:xfrm>
           <a:prstGeom prst="roundRect">
             <a:avLst/>
@@ -8413,23 +8234,111 @@
       </p:sp>
       <p:sp>
         <p:nvSpPr>
-          <p:cNvPr id="18" name="Rectangle 17"/>
+          <p:cNvPr id="13" name="TextBox 12"/>
+          <p:cNvSpPr txBox="1"/>
+          <p:nvPr/>
+        </p:nvSpPr>
+        <p:spPr>
+          <a:xfrm>
+            <a:off x="9966960" y="2057400"/>
+            <a:ext cx="1417320" cy="502920"/>
+          </a:xfrm>
+          <a:prstGeom prst="rect">
+            <a:avLst/>
+          </a:prstGeom>
+          <a:noFill/>
+        </p:spPr>
+        <p:txBody>
+          <a:bodyPr wrap="square" anchor="t" lIns="0" rIns="0" tIns="0" bIns="0">
+            <a:spAutoFit/>
+          </a:bodyPr>
+          <a:lstStyle/>
+          <a:p>
+            <a:pPr algn="ctr">
+              <a:lnSpc>
+                <a:spcPct val="100000"/>
+              </a:lnSpc>
+              <a:spcAft>
+                <a:spcPts val="400"/>
+              </a:spcAft>
+            </a:pPr>
+            <a:r>
+              <a:rPr sz="2300" b="1">
+                <a:solidFill>
+                  <a:srgbClr val="35C6BA"/>
+                </a:solidFill>
+                <a:latin typeface="Consolas"/>
+                <a:ea typeface="Consolas"/>
+              </a:rPr>
+              <a:t>2,601</a:t>
+            </a:r>
+          </a:p>
+        </p:txBody>
+      </p:sp>
+      <p:sp>
+        <p:nvSpPr>
+          <p:cNvPr id="14" name="TextBox 13"/>
+          <p:cNvSpPr txBox="1"/>
+          <p:nvPr/>
+        </p:nvSpPr>
+        <p:spPr>
+          <a:xfrm>
+            <a:off x="9966960" y="2587752"/>
+            <a:ext cx="1417320" cy="320040"/>
+          </a:xfrm>
+          <a:prstGeom prst="rect">
+            <a:avLst/>
+          </a:prstGeom>
+          <a:noFill/>
+        </p:spPr>
+        <p:txBody>
+          <a:bodyPr wrap="square" anchor="t" lIns="0" rIns="0" tIns="0" bIns="0">
+            <a:spAutoFit/>
+          </a:bodyPr>
+          <a:lstStyle/>
+          <a:p>
+            <a:pPr algn="ctr">
+              <a:lnSpc>
+                <a:spcPct val="100000"/>
+              </a:lnSpc>
+              <a:spcAft>
+                <a:spcPts val="400"/>
+              </a:spcAft>
+            </a:pPr>
+            <a:r>
+              <a:rPr sz="1150" b="0">
+                <a:solidFill>
+                  <a:srgbClr val="A6B6C4"/>
+                </a:solidFill>
+                <a:latin typeface="微软雅黑"/>
+                <a:ea typeface="微软雅黑"/>
+              </a:rPr>
+              <a:t>机理关系</a:t>
+            </a:r>
+          </a:p>
+        </p:txBody>
+      </p:sp>
+      <p:sp>
+        <p:nvSpPr>
+          <p:cNvPr id="15" name="Rounded Rectangle 14"/>
           <p:cNvSpPr/>
           <p:nvPr/>
         </p:nvSpPr>
         <p:spPr>
           <a:xfrm>
-            <a:off x="8321040" y="3657600"/>
-            <a:ext cx="457200" cy="54864"/>
-          </a:xfrm>
-          <a:prstGeom prst="rect">
+            <a:off x="6858000" y="3154679"/>
+            <a:ext cx="1417320" cy="1097280"/>
+          </a:xfrm>
+          <a:prstGeom prst="roundRect">
             <a:avLst/>
           </a:prstGeom>
           <a:solidFill>
-            <a:srgbClr val="35C6BA"/>
+            <a:srgbClr val="1A2734"/>
           </a:solidFill>
-          <a:ln>
-            <a:noFill/>
+          <a:ln w="12700">
+            <a:solidFill>
+              <a:srgbClr val="2A3A48"/>
+            </a:solidFill>
           </a:ln>
           <a:effectLst/>
         </p:spPr>
@@ -8457,14 +8366,14 @@
       </p:sp>
       <p:sp>
         <p:nvSpPr>
-          <p:cNvPr id="19" name="TextBox 18"/>
+          <p:cNvPr id="16" name="TextBox 15"/>
           <p:cNvSpPr txBox="1"/>
           <p:nvPr/>
         </p:nvSpPr>
         <p:spPr>
           <a:xfrm>
-            <a:off x="8321040" y="3840480"/>
-            <a:ext cx="2880360" cy="640080"/>
+            <a:off x="6858000" y="3337560"/>
+            <a:ext cx="1417320" cy="502920"/>
           </a:xfrm>
           <a:prstGeom prst="rect">
             <a:avLst/>
@@ -8477,37 +8386,37 @@
           </a:bodyPr>
           <a:lstStyle/>
           <a:p>
-            <a:pPr algn="l">
+            <a:pPr algn="ctr">
               <a:lnSpc>
-                <a:spcPct val="105000"/>
+                <a:spcPct val="100000"/>
               </a:lnSpc>
               <a:spcAft>
                 <a:spcPts val="400"/>
               </a:spcAft>
             </a:pPr>
             <a:r>
-              <a:rPr sz="1650" b="1">
-                <a:solidFill>
-                  <a:srgbClr val="EAF0F5"/>
-                </a:solidFill>
-                <a:latin typeface="微软雅黑"/>
-                <a:ea typeface="微软雅黑"/>
+              <a:rPr sz="2300" b="1">
+                <a:solidFill>
+                  <a:srgbClr val="57C28C"/>
+                </a:solidFill>
+                <a:latin typeface="Consolas"/>
+                <a:ea typeface="Consolas"/>
               </a:rPr>
-              <a:t>零训练 · 零 LLM 调用</a:t>
-            </a:r>
-          </a:p>
-        </p:txBody>
-      </p:sp>
-      <p:sp>
-        <p:nvSpPr>
-          <p:cNvPr id="20" name="TextBox 19"/>
+              <a:t>100%</a:t>
+            </a:r>
+          </a:p>
+        </p:txBody>
+      </p:sp>
+      <p:sp>
+        <p:nvSpPr>
+          <p:cNvPr id="17" name="TextBox 16"/>
           <p:cNvSpPr txBox="1"/>
           <p:nvPr/>
         </p:nvSpPr>
         <p:spPr>
           <a:xfrm>
-            <a:off x="8321040" y="4572000"/>
-            <a:ext cx="2880360" cy="1051560"/>
+            <a:off x="6858000" y="3867911"/>
+            <a:ext cx="1417320" cy="320040"/>
           </a:xfrm>
           <a:prstGeom prst="rect">
             <a:avLst/>
@@ -8520,23 +8429,287 @@
           </a:bodyPr>
           <a:lstStyle/>
           <a:p>
-            <a:pPr algn="l">
+            <a:pPr algn="ctr">
               <a:lnSpc>
-                <a:spcPct val="120000"/>
+                <a:spcPct val="100000"/>
               </a:lnSpc>
               <a:spcAft>
                 <a:spcPts val="400"/>
               </a:spcAft>
             </a:pPr>
             <a:r>
-              <a:rPr sz="1300" b="0">
+              <a:rPr sz="1150" b="0">
                 <a:solidFill>
                   <a:srgbClr val="A6B6C4"/>
                 </a:solidFill>
                 <a:latin typeface="微软雅黑"/>
                 <a:ea typeface="微软雅黑"/>
               </a:rPr>
-              <a:t>熵由知识库含义分布闭式算出，无需训练模型、无需调用大模型，适合本地/离线部署。</a:t>
+              <a:t>机理闭环</a:t>
+            </a:r>
+          </a:p>
+        </p:txBody>
+      </p:sp>
+      <p:sp>
+        <p:nvSpPr>
+          <p:cNvPr id="18" name="Rounded Rectangle 17"/>
+          <p:cNvSpPr/>
+          <p:nvPr/>
+        </p:nvSpPr>
+        <p:spPr>
+          <a:xfrm>
+            <a:off x="8412480" y="3154679"/>
+            <a:ext cx="1417320" cy="1097280"/>
+          </a:xfrm>
+          <a:prstGeom prst="roundRect">
+            <a:avLst/>
+          </a:prstGeom>
+          <a:solidFill>
+            <a:srgbClr val="1A2734"/>
+          </a:solidFill>
+          <a:ln w="12700">
+            <a:solidFill>
+              <a:srgbClr val="2A3A48"/>
+            </a:solidFill>
+          </a:ln>
+          <a:effectLst/>
+        </p:spPr>
+        <p:style>
+          <a:lnRef idx="1">
+            <a:schemeClr val="accent1"/>
+          </a:lnRef>
+          <a:fillRef idx="3">
+            <a:schemeClr val="accent1"/>
+          </a:fillRef>
+          <a:effectRef idx="2">
+            <a:schemeClr val="accent1"/>
+          </a:effectRef>
+          <a:fontRef idx="minor">
+            <a:schemeClr val="lt1"/>
+          </a:fontRef>
+        </p:style>
+        <p:txBody>
+          <a:bodyPr rtlCol="0" anchor="ctr"/>
+          <a:lstStyle/>
+          <a:p>
+            <a:pPr algn="ctr"/>
+          </a:p>
+        </p:txBody>
+      </p:sp>
+      <p:sp>
+        <p:nvSpPr>
+          <p:cNvPr id="19" name="TextBox 18"/>
+          <p:cNvSpPr txBox="1"/>
+          <p:nvPr/>
+        </p:nvSpPr>
+        <p:spPr>
+          <a:xfrm>
+            <a:off x="8412480" y="3337560"/>
+            <a:ext cx="1417320" cy="502920"/>
+          </a:xfrm>
+          <a:prstGeom prst="rect">
+            <a:avLst/>
+          </a:prstGeom>
+          <a:noFill/>
+        </p:spPr>
+        <p:txBody>
+          <a:bodyPr wrap="square" anchor="t" lIns="0" rIns="0" tIns="0" bIns="0">
+            <a:spAutoFit/>
+          </a:bodyPr>
+          <a:lstStyle/>
+          <a:p>
+            <a:pPr algn="ctr">
+              <a:lnSpc>
+                <a:spcPct val="100000"/>
+              </a:lnSpc>
+              <a:spcAft>
+                <a:spcPts val="400"/>
+              </a:spcAft>
+            </a:pPr>
+            <a:r>
+              <a:rPr sz="2300" b="1">
+                <a:solidFill>
+                  <a:srgbClr val="57C28C"/>
+                </a:solidFill>
+                <a:latin typeface="Consolas"/>
+                <a:ea typeface="Consolas"/>
+              </a:rPr>
+              <a:t>100%</a:t>
+            </a:r>
+          </a:p>
+        </p:txBody>
+      </p:sp>
+      <p:sp>
+        <p:nvSpPr>
+          <p:cNvPr id="20" name="TextBox 19"/>
+          <p:cNvSpPr txBox="1"/>
+          <p:nvPr/>
+        </p:nvSpPr>
+        <p:spPr>
+          <a:xfrm>
+            <a:off x="8412480" y="3867911"/>
+            <a:ext cx="1417320" cy="320040"/>
+          </a:xfrm>
+          <a:prstGeom prst="rect">
+            <a:avLst/>
+          </a:prstGeom>
+          <a:noFill/>
+        </p:spPr>
+        <p:txBody>
+          <a:bodyPr wrap="square" anchor="t" lIns="0" rIns="0" tIns="0" bIns="0">
+            <a:spAutoFit/>
+          </a:bodyPr>
+          <a:lstStyle/>
+          <a:p>
+            <a:pPr algn="ctr">
+              <a:lnSpc>
+                <a:spcPct val="100000"/>
+              </a:lnSpc>
+              <a:spcAft>
+                <a:spcPts val="400"/>
+              </a:spcAft>
+            </a:pPr>
+            <a:r>
+              <a:rPr sz="1150" b="0">
+                <a:solidFill>
+                  <a:srgbClr val="A6B6C4"/>
+                </a:solidFill>
+                <a:latin typeface="微软雅黑"/>
+                <a:ea typeface="微软雅黑"/>
+              </a:rPr>
+              <a:t>假设鉴别</a:t>
+            </a:r>
+          </a:p>
+        </p:txBody>
+      </p:sp>
+      <p:sp>
+        <p:nvSpPr>
+          <p:cNvPr id="21" name="Rounded Rectangle 20"/>
+          <p:cNvSpPr/>
+          <p:nvPr/>
+        </p:nvSpPr>
+        <p:spPr>
+          <a:xfrm>
+            <a:off x="9966960" y="3154679"/>
+            <a:ext cx="1417320" cy="1097280"/>
+          </a:xfrm>
+          <a:prstGeom prst="roundRect">
+            <a:avLst/>
+          </a:prstGeom>
+          <a:solidFill>
+            <a:srgbClr val="1A2734"/>
+          </a:solidFill>
+          <a:ln w="12700">
+            <a:solidFill>
+              <a:srgbClr val="2A3A48"/>
+            </a:solidFill>
+          </a:ln>
+          <a:effectLst/>
+        </p:spPr>
+        <p:style>
+          <a:lnRef idx="1">
+            <a:schemeClr val="accent1"/>
+          </a:lnRef>
+          <a:fillRef idx="3">
+            <a:schemeClr val="accent1"/>
+          </a:fillRef>
+          <a:effectRef idx="2">
+            <a:schemeClr val="accent1"/>
+          </a:effectRef>
+          <a:fontRef idx="minor">
+            <a:schemeClr val="lt1"/>
+          </a:fontRef>
+        </p:style>
+        <p:txBody>
+          <a:bodyPr rtlCol="0" anchor="ctr"/>
+          <a:lstStyle/>
+          <a:p>
+            <a:pPr algn="ctr"/>
+          </a:p>
+        </p:txBody>
+      </p:sp>
+      <p:sp>
+        <p:nvSpPr>
+          <p:cNvPr id="22" name="TextBox 21"/>
+          <p:cNvSpPr txBox="1"/>
+          <p:nvPr/>
+        </p:nvSpPr>
+        <p:spPr>
+          <a:xfrm>
+            <a:off x="9966960" y="3337560"/>
+            <a:ext cx="1417320" cy="502920"/>
+          </a:xfrm>
+          <a:prstGeom prst="rect">
+            <a:avLst/>
+          </a:prstGeom>
+          <a:noFill/>
+        </p:spPr>
+        <p:txBody>
+          <a:bodyPr wrap="square" anchor="t" lIns="0" rIns="0" tIns="0" bIns="0">
+            <a:spAutoFit/>
+          </a:bodyPr>
+          <a:lstStyle/>
+          <a:p>
+            <a:pPr algn="ctr">
+              <a:lnSpc>
+                <a:spcPct val="100000"/>
+              </a:lnSpc>
+              <a:spcAft>
+                <a:spcPts val="400"/>
+              </a:spcAft>
+            </a:pPr>
+            <a:r>
+              <a:rPr sz="2300" b="1">
+                <a:solidFill>
+                  <a:srgbClr val="35C6BA"/>
+                </a:solidFill>
+                <a:latin typeface="Consolas"/>
+                <a:ea typeface="Consolas"/>
+              </a:rPr>
+              <a:t>3.0</a:t>
+            </a:r>
+          </a:p>
+        </p:txBody>
+      </p:sp>
+      <p:sp>
+        <p:nvSpPr>
+          <p:cNvPr id="23" name="TextBox 22"/>
+          <p:cNvSpPr txBox="1"/>
+          <p:nvPr/>
+        </p:nvSpPr>
+        <p:spPr>
+          <a:xfrm>
+            <a:off x="9966960" y="3867911"/>
+            <a:ext cx="1417320" cy="320040"/>
+          </a:xfrm>
+          <a:prstGeom prst="rect">
+            <a:avLst/>
+          </a:prstGeom>
+          <a:noFill/>
+        </p:spPr>
+        <p:txBody>
+          <a:bodyPr wrap="square" anchor="t" lIns="0" rIns="0" tIns="0" bIns="0">
+            <a:spAutoFit/>
+          </a:bodyPr>
+          <a:lstStyle/>
+          <a:p>
+            <a:pPr algn="ctr">
+              <a:lnSpc>
+                <a:spcPct val="100000"/>
+              </a:lnSpc>
+              <a:spcAft>
+                <a:spcPts val="400"/>
+              </a:spcAft>
+            </a:pPr>
+            <a:r>
+              <a:rPr sz="1150" b="0">
+                <a:solidFill>
+                  <a:srgbClr val="A6B6C4"/>
+                </a:solidFill>
+                <a:latin typeface="微软雅黑"/>
+                <a:ea typeface="微软雅黑"/>
+              </a:rPr>
+              <a:t>平均路径深度</a:t>
             </a:r>
           </a:p>
         </p:txBody>
@@ -8575,8 +8748,8 @@
         </p:nvSpPr>
         <p:spPr>
           <a:xfrm>
-            <a:off x="822960" y="658368"/>
-            <a:ext cx="292608" cy="27432"/>
+            <a:off x="0" y="0"/>
+            <a:ext cx="12191695" cy="91440"/>
           </a:xfrm>
           <a:prstGeom prst="rect">
             <a:avLst/>
@@ -8613,7 +8786,51 @@
       </p:sp>
       <p:sp>
         <p:nvSpPr>
-          <p:cNvPr id="3" name="TextBox 2"/>
+          <p:cNvPr id="3" name="Rectangle 2"/>
+          <p:cNvSpPr/>
+          <p:nvPr/>
+        </p:nvSpPr>
+        <p:spPr>
+          <a:xfrm>
+            <a:off x="822960" y="658368"/>
+            <a:ext cx="292608" cy="27432"/>
+          </a:xfrm>
+          <a:prstGeom prst="rect">
+            <a:avLst/>
+          </a:prstGeom>
+          <a:solidFill>
+            <a:srgbClr val="35C6BA"/>
+          </a:solidFill>
+          <a:ln>
+            <a:noFill/>
+          </a:ln>
+          <a:effectLst/>
+        </p:spPr>
+        <p:style>
+          <a:lnRef idx="1">
+            <a:schemeClr val="accent1"/>
+          </a:lnRef>
+          <a:fillRef idx="3">
+            <a:schemeClr val="accent1"/>
+          </a:fillRef>
+          <a:effectRef idx="2">
+            <a:schemeClr val="accent1"/>
+          </a:effectRef>
+          <a:fontRef idx="minor">
+            <a:schemeClr val="lt1"/>
+          </a:fontRef>
+        </p:style>
+        <p:txBody>
+          <a:bodyPr rtlCol="0" anchor="ctr"/>
+          <a:lstStyle/>
+          <a:p>
+            <a:pPr algn="ctr"/>
+          </a:p>
+        </p:txBody>
+      </p:sp>
+      <p:sp>
+        <p:nvSpPr>
+          <p:cNvPr id="4" name="TextBox 3"/>
           <p:cNvSpPr txBox="1"/>
           <p:nvPr/>
         </p:nvSpPr>
@@ -8649,21 +8866,21 @@
                 <a:latin typeface="Consolas"/>
                 <a:ea typeface="Consolas"/>
               </a:rPr>
-              <a:t>05 · AEG 有效性 · 留一法真实实测</a:t>
-            </a:r>
-          </a:p>
-        </p:txBody>
-      </p:sp>
-      <p:sp>
-        <p:nvSpPr>
-          <p:cNvPr id="4" name="TextBox 3"/>
+              <a:t>05 · 创新亮点 · 歧义熵门控 AEG</a:t>
+            </a:r>
+          </a:p>
+        </p:txBody>
+      </p:sp>
+      <p:sp>
+        <p:nvSpPr>
+          <p:cNvPr id="5" name="TextBox 4"/>
           <p:cNvSpPr txBox="1"/>
           <p:nvPr/>
         </p:nvSpPr>
         <p:spPr>
           <a:xfrm>
             <a:off x="822960" y="1005840"/>
-            <a:ext cx="10515600" cy="822960"/>
+            <a:ext cx="10515600" cy="914400"/>
           </a:xfrm>
           <a:prstGeom prst="rect">
             <a:avLst/>
@@ -8685,28 +8902,240 @@
               </a:spcAft>
             </a:pPr>
             <a:r>
-              <a:rPr sz="2800" b="1">
+              <a:rPr sz="3000" b="1">
                 <a:solidFill>
                   <a:srgbClr val="EAF0F5"/>
                 </a:solidFill>
                 <a:latin typeface="微软雅黑"/>
                 <a:ea typeface="微软雅黑"/>
               </a:rPr>
-              <a:t>11,476 条真实故障记录，实测而非理论期望</a:t>
-            </a:r>
-          </a:p>
-        </p:txBody>
-      </p:sp>
-      <p:sp>
-        <p:nvSpPr>
-          <p:cNvPr id="5" name="Rounded Rectangle 4"/>
+              <a:t>用信息论在检索前主动预测消歧风险</a:t>
+            </a:r>
+          </a:p>
+        </p:txBody>
+      </p:sp>
+      <p:sp>
+        <p:nvSpPr>
+          <p:cNvPr id="6" name="Rounded Rectangle 5"/>
           <p:cNvSpPr/>
           <p:nvPr/>
         </p:nvSpPr>
         <p:spPr>
           <a:xfrm>
-            <a:off x="822960" y="1920240"/>
-            <a:ext cx="2514600" cy="1234440"/>
+            <a:off x="822960" y="2057400"/>
+            <a:ext cx="10515600" cy="1051560"/>
+          </a:xfrm>
+          <a:prstGeom prst="roundRect">
+            <a:avLst/>
+          </a:prstGeom>
+          <a:solidFill>
+            <a:srgbClr val="223140"/>
+          </a:solidFill>
+          <a:ln w="15240">
+            <a:solidFill>
+              <a:srgbClr val="35C6BA"/>
+            </a:solidFill>
+          </a:ln>
+          <a:effectLst/>
+        </p:spPr>
+        <p:style>
+          <a:lnRef idx="1">
+            <a:schemeClr val="accent1"/>
+          </a:lnRef>
+          <a:fillRef idx="3">
+            <a:schemeClr val="accent1"/>
+          </a:fillRef>
+          <a:effectRef idx="2">
+            <a:schemeClr val="accent1"/>
+          </a:effectRef>
+          <a:fontRef idx="minor">
+            <a:schemeClr val="lt1"/>
+          </a:fontRef>
+        </p:style>
+        <p:txBody>
+          <a:bodyPr rtlCol="0" anchor="ctr"/>
+          <a:lstStyle/>
+          <a:p>
+            <a:pPr algn="ctr"/>
+          </a:p>
+        </p:txBody>
+      </p:sp>
+      <p:sp>
+        <p:nvSpPr>
+          <p:cNvPr id="7" name="TextBox 6"/>
+          <p:cNvSpPr txBox="1"/>
+          <p:nvPr/>
+        </p:nvSpPr>
+        <p:spPr>
+          <a:xfrm>
+            <a:off x="1188720" y="2212848"/>
+            <a:ext cx="9784080" cy="457200"/>
+          </a:xfrm>
+          <a:prstGeom prst="rect">
+            <a:avLst/>
+          </a:prstGeom>
+          <a:noFill/>
+        </p:spPr>
+        <p:txBody>
+          <a:bodyPr wrap="square" anchor="t" lIns="0" rIns="0" tIns="0" bIns="0">
+            <a:spAutoFit/>
+          </a:bodyPr>
+          <a:lstStyle/>
+          <a:p>
+            <a:pPr algn="l">
+              <a:lnSpc>
+                <a:spcPct val="100000"/>
+              </a:lnSpc>
+              <a:spcAft>
+                <a:spcPts val="400"/>
+              </a:spcAft>
+            </a:pPr>
+            <a:r>
+              <a:rPr sz="2600" b="1">
+                <a:solidFill>
+                  <a:srgbClr val="35C6BA"/>
+                </a:solidFill>
+                <a:latin typeface="Consolas"/>
+                <a:ea typeface="Consolas"/>
+              </a:rPr>
+              <a:t>H(c) = − Σ </a:t>
+            </a:r>
+            <a:r>
+              <a:rPr sz="2600" b="1">
+                <a:solidFill>
+                  <a:srgbClr val="35C6BA"/>
+                </a:solidFill>
+                <a:latin typeface="Consolas"/>
+                <a:ea typeface="Consolas"/>
+              </a:rPr>
+              <a:t>p</a:t>
+            </a:r>
+            <a:r>
+              <a:rPr sz="1700" b="1" baseline="-25000">
+                <a:solidFill>
+                  <a:srgbClr val="35C6BA"/>
+                </a:solidFill>
+                <a:latin typeface="Consolas"/>
+                <a:ea typeface="Consolas"/>
+              </a:rPr>
+              <a:t>i</a:t>
+            </a:r>
+            <a:r>
+              <a:rPr sz="2600" b="1">
+                <a:solidFill>
+                  <a:srgbClr val="35C6BA"/>
+                </a:solidFill>
+                <a:latin typeface="Consolas"/>
+                <a:ea typeface="Consolas"/>
+              </a:rPr>
+              <a:t> · log</a:t>
+            </a:r>
+            <a:r>
+              <a:rPr sz="1700" b="1" baseline="-25000">
+                <a:solidFill>
+                  <a:srgbClr val="35C6BA"/>
+                </a:solidFill>
+                <a:latin typeface="Consolas"/>
+                <a:ea typeface="Consolas"/>
+              </a:rPr>
+              <a:t>2</a:t>
+            </a:r>
+            <a:r>
+              <a:rPr sz="2600" b="1">
+                <a:solidFill>
+                  <a:srgbClr val="35C6BA"/>
+                </a:solidFill>
+                <a:latin typeface="Consolas"/>
+                <a:ea typeface="Consolas"/>
+              </a:rPr>
+              <a:t> p</a:t>
+            </a:r>
+            <a:r>
+              <a:rPr sz="1700" b="1" baseline="-25000">
+                <a:solidFill>
+                  <a:srgbClr val="35C6BA"/>
+                </a:solidFill>
+                <a:latin typeface="Consolas"/>
+                <a:ea typeface="Consolas"/>
+              </a:rPr>
+              <a:t>i</a:t>
+            </a:r>
+          </a:p>
+        </p:txBody>
+      </p:sp>
+      <p:sp>
+        <p:nvSpPr>
+          <p:cNvPr id="8" name="TextBox 7"/>
+          <p:cNvSpPr txBox="1"/>
+          <p:nvPr/>
+        </p:nvSpPr>
+        <p:spPr>
+          <a:xfrm>
+            <a:off x="1188720" y="2697480"/>
+            <a:ext cx="9784080" cy="365760"/>
+          </a:xfrm>
+          <a:prstGeom prst="rect">
+            <a:avLst/>
+          </a:prstGeom>
+          <a:noFill/>
+        </p:spPr>
+        <p:txBody>
+          <a:bodyPr wrap="square" anchor="t" lIns="0" rIns="0" tIns="0" bIns="0">
+            <a:spAutoFit/>
+          </a:bodyPr>
+          <a:lstStyle/>
+          <a:p>
+            <a:pPr algn="l">
+              <a:lnSpc>
+                <a:spcPct val="100000"/>
+              </a:lnSpc>
+              <a:spcAft>
+                <a:spcPts val="400"/>
+              </a:spcAft>
+            </a:pPr>
+            <a:r>
+              <a:rPr sz="1350" b="0">
+                <a:solidFill>
+                  <a:srgbClr val="A6B6C4"/>
+                </a:solidFill>
+                <a:latin typeface="Consolas"/>
+                <a:ea typeface="Consolas"/>
+              </a:rPr>
+              <a:t>p</a:t>
+            </a:r>
+            <a:r>
+              <a:rPr sz="900" b="0" baseline="-25000">
+                <a:solidFill>
+                  <a:srgbClr val="A6B6C4"/>
+                </a:solidFill>
+                <a:latin typeface="Consolas"/>
+                <a:ea typeface="Consolas"/>
+              </a:rPr>
+              <a:t>i</a:t>
+            </a:r>
+            <a:r>
+              <a:rPr sz="1350" b="0">
+                <a:solidFill>
+                  <a:srgbClr val="A6B6C4"/>
+                </a:solidFill>
+                <a:latin typeface="微软雅黑"/>
+                <a:ea typeface="微软雅黑"/>
+              </a:rPr>
+              <a:t> = 故障码 c 映射到第 i 种含义的概率；H=0 单义直接答，H 越大越该在检索前追问机型。</a:t>
+            </a:r>
+          </a:p>
+        </p:txBody>
+      </p:sp>
+      <p:sp>
+        <p:nvSpPr>
+          <p:cNvPr id="9" name="Rounded Rectangle 8"/>
+          <p:cNvSpPr/>
+          <p:nvPr/>
+        </p:nvSpPr>
+        <p:spPr>
+          <a:xfrm>
+            <a:off x="822960" y="3429000"/>
+            <a:ext cx="3429000" cy="2286000"/>
           </a:xfrm>
           <a:prstGeom prst="roundRect">
             <a:avLst/>
@@ -8745,57 +9174,58 @@
       </p:sp>
       <p:sp>
         <p:nvSpPr>
-          <p:cNvPr id="6" name="TextBox 5"/>
+          <p:cNvPr id="10" name="Rectangle 9"/>
+          <p:cNvSpPr/>
+          <p:nvPr/>
+        </p:nvSpPr>
+        <p:spPr>
+          <a:xfrm>
+            <a:off x="1097280" y="3657600"/>
+            <a:ext cx="457200" cy="54864"/>
+          </a:xfrm>
+          <a:prstGeom prst="rect">
+            <a:avLst/>
+          </a:prstGeom>
+          <a:solidFill>
+            <a:srgbClr val="35C6BA"/>
+          </a:solidFill>
+          <a:ln>
+            <a:noFill/>
+          </a:ln>
+          <a:effectLst/>
+        </p:spPr>
+        <p:style>
+          <a:lnRef idx="1">
+            <a:schemeClr val="accent1"/>
+          </a:lnRef>
+          <a:fillRef idx="3">
+            <a:schemeClr val="accent1"/>
+          </a:fillRef>
+          <a:effectRef idx="2">
+            <a:schemeClr val="accent1"/>
+          </a:effectRef>
+          <a:fontRef idx="minor">
+            <a:schemeClr val="lt1"/>
+          </a:fontRef>
+        </p:style>
+        <p:txBody>
+          <a:bodyPr rtlCol="0" anchor="ctr"/>
+          <a:lstStyle/>
+          <a:p>
+            <a:pPr algn="ctr"/>
+          </a:p>
+        </p:txBody>
+      </p:sp>
+      <p:sp>
+        <p:nvSpPr>
+          <p:cNvPr id="11" name="TextBox 10"/>
           <p:cNvSpPr txBox="1"/>
           <p:nvPr/>
         </p:nvSpPr>
         <p:spPr>
           <a:xfrm>
-            <a:off x="1005840" y="2121408"/>
-            <a:ext cx="2194560" cy="548640"/>
-          </a:xfrm>
-          <a:prstGeom prst="rect">
-            <a:avLst/>
-          </a:prstGeom>
-          <a:noFill/>
-        </p:spPr>
-        <p:txBody>
-          <a:bodyPr wrap="square" anchor="t" lIns="0" rIns="0" tIns="0" bIns="0">
-            <a:spAutoFit/>
-          </a:bodyPr>
-          <a:lstStyle/>
-          <a:p>
-            <a:pPr algn="l">
-              <a:lnSpc>
-                <a:spcPct val="100000"/>
-              </a:lnSpc>
-              <a:spcAft>
-                <a:spcPts val="400"/>
-              </a:spcAft>
-            </a:pPr>
-            <a:r>
-              <a:rPr sz="3000" b="1">
-                <a:solidFill>
-                  <a:srgbClr val="E0A94A"/>
-                </a:solidFill>
-                <a:latin typeface="Consolas"/>
-                <a:ea typeface="Consolas"/>
-              </a:rPr>
-              <a:t>51.7%</a:t>
-            </a:r>
-          </a:p>
-        </p:txBody>
-      </p:sp>
-      <p:sp>
-        <p:nvSpPr>
-          <p:cNvPr id="7" name="TextBox 6"/>
-          <p:cNvSpPr txBox="1"/>
-          <p:nvPr/>
-        </p:nvSpPr>
-        <p:spPr>
-          <a:xfrm>
-            <a:off x="1005840" y="2697480"/>
-            <a:ext cx="2194560" cy="411480"/>
+            <a:off x="1097280" y="3840480"/>
+            <a:ext cx="2880360" cy="640080"/>
           </a:xfrm>
           <a:prstGeom prst="rect">
             <a:avLst/>
@@ -8817,28 +9247,71 @@
               </a:spcAft>
             </a:pPr>
             <a:r>
-              <a:rPr sz="1200" b="0">
-                <a:solidFill>
-                  <a:srgbClr val="A6B6C4"/>
+              <a:rPr sz="1650" b="1">
+                <a:solidFill>
+                  <a:srgbClr val="EAF0F5"/>
                 </a:solidFill>
                 <a:latin typeface="微软雅黑"/>
                 <a:ea typeface="微软雅黑"/>
               </a:rPr>
-              <a:t>留一实测基线误命中</a:t>
-            </a:r>
-          </a:p>
-        </p:txBody>
-      </p:sp>
-      <p:sp>
-        <p:nvSpPr>
-          <p:cNvPr id="8" name="Rounded Rectangle 7"/>
+              <a:t>被动 → 主动</a:t>
+            </a:r>
+          </a:p>
+        </p:txBody>
+      </p:sp>
+      <p:sp>
+        <p:nvSpPr>
+          <p:cNvPr id="12" name="TextBox 11"/>
+          <p:cNvSpPr txBox="1"/>
+          <p:nvPr/>
+        </p:nvSpPr>
+        <p:spPr>
+          <a:xfrm>
+            <a:off x="1097280" y="4572000"/>
+            <a:ext cx="2880360" cy="1051560"/>
+          </a:xfrm>
+          <a:prstGeom prst="rect">
+            <a:avLst/>
+          </a:prstGeom>
+          <a:noFill/>
+        </p:spPr>
+        <p:txBody>
+          <a:bodyPr wrap="square" anchor="t" lIns="0" rIns="0" tIns="0" bIns="0">
+            <a:spAutoFit/>
+          </a:bodyPr>
+          <a:lstStyle/>
+          <a:p>
+            <a:pPr algn="l">
+              <a:lnSpc>
+                <a:spcPct val="120000"/>
+              </a:lnSpc>
+              <a:spcAft>
+                <a:spcPts val="400"/>
+              </a:spcAft>
+            </a:pPr>
+            <a:r>
+              <a:rPr sz="1300" b="0">
+                <a:solidFill>
+                  <a:srgbClr val="A6B6C4"/>
+                </a:solidFill>
+                <a:latin typeface="微软雅黑"/>
+                <a:ea typeface="微软雅黑"/>
+              </a:rPr>
+              <a:t>现有做法检索后发现歧义才提示；AEG 在检索之前用一个标量预测风险，主动决定是否追问。</a:t>
+            </a:r>
+          </a:p>
+        </p:txBody>
+      </p:sp>
+      <p:sp>
+        <p:nvSpPr>
+          <p:cNvPr id="13" name="Rounded Rectangle 12"/>
           <p:cNvSpPr/>
           <p:nvPr/>
         </p:nvSpPr>
         <p:spPr>
           <a:xfrm>
-            <a:off x="3520440" y="1920240"/>
-            <a:ext cx="2514600" cy="1234440"/>
+            <a:off x="4434840" y="3429000"/>
+            <a:ext cx="3429000" cy="2286000"/>
           </a:xfrm>
           <a:prstGeom prst="roundRect">
             <a:avLst/>
@@ -8877,57 +9350,58 @@
       </p:sp>
       <p:sp>
         <p:nvSpPr>
-          <p:cNvPr id="9" name="TextBox 8"/>
+          <p:cNvPr id="14" name="Rectangle 13"/>
+          <p:cNvSpPr/>
+          <p:nvPr/>
+        </p:nvSpPr>
+        <p:spPr>
+          <a:xfrm>
+            <a:off x="4709160" y="3657600"/>
+            <a:ext cx="457200" cy="54864"/>
+          </a:xfrm>
+          <a:prstGeom prst="rect">
+            <a:avLst/>
+          </a:prstGeom>
+          <a:solidFill>
+            <a:srgbClr val="35C6BA"/>
+          </a:solidFill>
+          <a:ln>
+            <a:noFill/>
+          </a:ln>
+          <a:effectLst/>
+        </p:spPr>
+        <p:style>
+          <a:lnRef idx="1">
+            <a:schemeClr val="accent1"/>
+          </a:lnRef>
+          <a:fillRef idx="3">
+            <a:schemeClr val="accent1"/>
+          </a:fillRef>
+          <a:effectRef idx="2">
+            <a:schemeClr val="accent1"/>
+          </a:effectRef>
+          <a:fontRef idx="minor">
+            <a:schemeClr val="lt1"/>
+          </a:fontRef>
+        </p:style>
+        <p:txBody>
+          <a:bodyPr rtlCol="0" anchor="ctr"/>
+          <a:lstStyle/>
+          <a:p>
+            <a:pPr algn="ctr"/>
+          </a:p>
+        </p:txBody>
+      </p:sp>
+      <p:sp>
+        <p:nvSpPr>
+          <p:cNvPr id="15" name="TextBox 14"/>
           <p:cNvSpPr txBox="1"/>
           <p:nvPr/>
         </p:nvSpPr>
         <p:spPr>
           <a:xfrm>
-            <a:off x="3703320" y="2121408"/>
-            <a:ext cx="2194560" cy="548640"/>
-          </a:xfrm>
-          <a:prstGeom prst="rect">
-            <a:avLst/>
-          </a:prstGeom>
-          <a:noFill/>
-        </p:spPr>
-        <p:txBody>
-          <a:bodyPr wrap="square" anchor="t" lIns="0" rIns="0" tIns="0" bIns="0">
-            <a:spAutoFit/>
-          </a:bodyPr>
-          <a:lstStyle/>
-          <a:p>
-            <a:pPr algn="l">
-              <a:lnSpc>
-                <a:spcPct val="100000"/>
-              </a:lnSpc>
-              <a:spcAft>
-                <a:spcPts val="400"/>
-              </a:spcAft>
-            </a:pPr>
-            <a:r>
-              <a:rPr sz="3000" b="1">
-                <a:solidFill>
-                  <a:srgbClr val="35C6BA"/>
-                </a:solidFill>
-                <a:latin typeface="Consolas"/>
-                <a:ea typeface="Consolas"/>
-              </a:rPr>
-              <a:t>0.92</a:t>
-            </a:r>
-          </a:p>
-        </p:txBody>
-      </p:sp>
-      <p:sp>
-        <p:nvSpPr>
-          <p:cNvPr id="10" name="TextBox 9"/>
-          <p:cNvSpPr txBox="1"/>
-          <p:nvPr/>
-        </p:nvSpPr>
-        <p:spPr>
-          <a:xfrm>
-            <a:off x="3703320" y="2697480"/>
-            <a:ext cx="2194560" cy="411480"/>
+            <a:off x="4709160" y="3840480"/>
+            <a:ext cx="2880360" cy="640080"/>
           </a:xfrm>
           <a:prstGeom prst="rect">
             <a:avLst/>
@@ -8949,28 +9423,71 @@
               </a:spcAft>
             </a:pPr>
             <a:r>
-              <a:rPr sz="1200" b="0">
-                <a:solidFill>
-                  <a:srgbClr val="A6B6C4"/>
+              <a:rPr sz="1650" b="1">
+                <a:solidFill>
+                  <a:srgbClr val="EAF0F5"/>
                 </a:solidFill>
                 <a:latin typeface="微软雅黑"/>
                 <a:ea typeface="微软雅黑"/>
               </a:rPr>
-              <a:t>熵↔误命中 Spearman</a:t>
-            </a:r>
-          </a:p>
-        </p:txBody>
-      </p:sp>
-      <p:sp>
-        <p:nvSpPr>
-          <p:cNvPr id="11" name="Rounded Rectangle 10"/>
+              <a:t>可量化 · 可设阈值</a:t>
+            </a:r>
+          </a:p>
+        </p:txBody>
+      </p:sp>
+      <p:sp>
+        <p:nvSpPr>
+          <p:cNvPr id="16" name="TextBox 15"/>
+          <p:cNvSpPr txBox="1"/>
+          <p:nvPr/>
+        </p:nvSpPr>
+        <p:spPr>
+          <a:xfrm>
+            <a:off x="4709160" y="4572000"/>
+            <a:ext cx="2880360" cy="1051560"/>
+          </a:xfrm>
+          <a:prstGeom prst="rect">
+            <a:avLst/>
+          </a:prstGeom>
+          <a:noFill/>
+        </p:spPr>
+        <p:txBody>
+          <a:bodyPr wrap="square" anchor="t" lIns="0" rIns="0" tIns="0" bIns="0">
+            <a:spAutoFit/>
+          </a:bodyPr>
+          <a:lstStyle/>
+          <a:p>
+            <a:pPr algn="l">
+              <a:lnSpc>
+                <a:spcPct val="120000"/>
+              </a:lnSpc>
+              <a:spcAft>
+                <a:spcPts val="400"/>
+              </a:spcAft>
+            </a:pPr>
+            <a:r>
+              <a:rPr sz="1300" b="0">
+                <a:solidFill>
+                  <a:srgbClr val="A6B6C4"/>
+                </a:solidFill>
+                <a:latin typeface="微软雅黑"/>
+                <a:ea typeface="微软雅黑"/>
+              </a:rPr>
+              <a:t>阈值 τ 直接对应'追问成本与误命中'的帕累托工作点，单一可解释度量便于审核。</a:t>
+            </a:r>
+          </a:p>
+        </p:txBody>
+      </p:sp>
+      <p:sp>
+        <p:nvSpPr>
+          <p:cNvPr id="17" name="Rounded Rectangle 16"/>
           <p:cNvSpPr/>
           <p:nvPr/>
         </p:nvSpPr>
         <p:spPr>
           <a:xfrm>
-            <a:off x="6217920" y="1920240"/>
-            <a:ext cx="2514600" cy="1234440"/>
+            <a:off x="8046720" y="3429000"/>
+            <a:ext cx="3429000" cy="2286000"/>
           </a:xfrm>
           <a:prstGeom prst="roundRect">
             <a:avLst/>
@@ -9009,57 +9526,58 @@
       </p:sp>
       <p:sp>
         <p:nvSpPr>
-          <p:cNvPr id="12" name="TextBox 11"/>
+          <p:cNvPr id="18" name="Rectangle 17"/>
+          <p:cNvSpPr/>
+          <p:nvPr/>
+        </p:nvSpPr>
+        <p:spPr>
+          <a:xfrm>
+            <a:off x="8321040" y="3657600"/>
+            <a:ext cx="457200" cy="54864"/>
+          </a:xfrm>
+          <a:prstGeom prst="rect">
+            <a:avLst/>
+          </a:prstGeom>
+          <a:solidFill>
+            <a:srgbClr val="35C6BA"/>
+          </a:solidFill>
+          <a:ln>
+            <a:noFill/>
+          </a:ln>
+          <a:effectLst/>
+        </p:spPr>
+        <p:style>
+          <a:lnRef idx="1">
+            <a:schemeClr val="accent1"/>
+          </a:lnRef>
+          <a:fillRef idx="3">
+            <a:schemeClr val="accent1"/>
+          </a:fillRef>
+          <a:effectRef idx="2">
+            <a:schemeClr val="accent1"/>
+          </a:effectRef>
+          <a:fontRef idx="minor">
+            <a:schemeClr val="lt1"/>
+          </a:fontRef>
+        </p:style>
+        <p:txBody>
+          <a:bodyPr rtlCol="0" anchor="ctr"/>
+          <a:lstStyle/>
+          <a:p>
+            <a:pPr algn="ctr"/>
+          </a:p>
+        </p:txBody>
+      </p:sp>
+      <p:sp>
+        <p:nvSpPr>
+          <p:cNvPr id="19" name="TextBox 18"/>
           <p:cNvSpPr txBox="1"/>
           <p:nvPr/>
         </p:nvSpPr>
         <p:spPr>
           <a:xfrm>
-            <a:off x="6400800" y="2121408"/>
-            <a:ext cx="2194560" cy="548640"/>
-          </a:xfrm>
-          <a:prstGeom prst="rect">
-            <a:avLst/>
-          </a:prstGeom>
-          <a:noFill/>
-        </p:spPr>
-        <p:txBody>
-          <a:bodyPr wrap="square" anchor="t" lIns="0" rIns="0" tIns="0" bIns="0">
-            <a:spAutoFit/>
-          </a:bodyPr>
-          <a:lstStyle/>
-          <a:p>
-            <a:pPr algn="l">
-              <a:lnSpc>
-                <a:spcPct val="100000"/>
-              </a:lnSpc>
-              <a:spcAft>
-                <a:spcPts val="400"/>
-              </a:spcAft>
-            </a:pPr>
-            <a:r>
-              <a:rPr sz="3000" b="1">
-                <a:solidFill>
-                  <a:srgbClr val="35C6BA"/>
-                </a:solidFill>
-                <a:latin typeface="Consolas"/>
-                <a:ea typeface="Consolas"/>
-              </a:rPr>
-              <a:t>0.72</a:t>
-            </a:r>
-          </a:p>
-        </p:txBody>
-      </p:sp>
-      <p:sp>
-        <p:nvSpPr>
-          <p:cNvPr id="13" name="TextBox 12"/>
-          <p:cNvSpPr txBox="1"/>
-          <p:nvPr/>
-        </p:nvSpPr>
-        <p:spPr>
-          <a:xfrm>
-            <a:off x="6400800" y="2697480"/>
-            <a:ext cx="2194560" cy="411480"/>
+            <a:off x="8321040" y="3840480"/>
+            <a:ext cx="2880360" cy="640080"/>
           </a:xfrm>
           <a:prstGeom prst="rect">
             <a:avLst/>
@@ -9081,74 +9599,28 @@
               </a:spcAft>
             </a:pPr>
             <a:r>
-              <a:rPr sz="1200" b="0">
-                <a:solidFill>
-                  <a:srgbClr val="A6B6C4"/>
+              <a:rPr sz="1650" b="1">
+                <a:solidFill>
+                  <a:srgbClr val="EAF0F5"/>
                 </a:solidFill>
                 <a:latin typeface="微软雅黑"/>
                 <a:ea typeface="微软雅黑"/>
               </a:rPr>
-              <a:t>熵↔增益 相关(独立验证)</a:t>
-            </a:r>
-          </a:p>
-        </p:txBody>
-      </p:sp>
-      <p:sp>
-        <p:nvSpPr>
-          <p:cNvPr id="14" name="Rounded Rectangle 13"/>
-          <p:cNvSpPr/>
-          <p:nvPr/>
-        </p:nvSpPr>
-        <p:spPr>
-          <a:xfrm>
-            <a:off x="8915400" y="1920240"/>
-            <a:ext cx="2514600" cy="1234440"/>
-          </a:xfrm>
-          <a:prstGeom prst="roundRect">
-            <a:avLst/>
-          </a:prstGeom>
-          <a:solidFill>
-            <a:srgbClr val="1A2734"/>
-          </a:solidFill>
-          <a:ln w="12700">
-            <a:solidFill>
-              <a:srgbClr val="2A3A48"/>
-            </a:solidFill>
-          </a:ln>
-          <a:effectLst/>
-        </p:spPr>
-        <p:style>
-          <a:lnRef idx="1">
-            <a:schemeClr val="accent1"/>
-          </a:lnRef>
-          <a:fillRef idx="3">
-            <a:schemeClr val="accent1"/>
-          </a:fillRef>
-          <a:effectRef idx="2">
-            <a:schemeClr val="accent1"/>
-          </a:effectRef>
-          <a:fontRef idx="minor">
-            <a:schemeClr val="lt1"/>
-          </a:fontRef>
-        </p:style>
-        <p:txBody>
-          <a:bodyPr rtlCol="0" anchor="ctr"/>
-          <a:lstStyle/>
-          <a:p>
-            <a:pPr algn="ctr"/>
-          </a:p>
-        </p:txBody>
-      </p:sp>
-      <p:sp>
-        <p:nvSpPr>
-          <p:cNvPr id="15" name="TextBox 14"/>
+              <a:t>零训练 · 零 LLM 调用</a:t>
+            </a:r>
+          </a:p>
+        </p:txBody>
+      </p:sp>
+      <p:sp>
+        <p:nvSpPr>
+          <p:cNvPr id="20" name="TextBox 19"/>
           <p:cNvSpPr txBox="1"/>
           <p:nvPr/>
         </p:nvSpPr>
         <p:spPr>
           <a:xfrm>
-            <a:off x="9098280" y="2121408"/>
-            <a:ext cx="2194560" cy="548640"/>
+            <a:off x="8321040" y="4572000"/>
+            <a:ext cx="2880360" cy="1051560"/>
           </a:xfrm>
           <a:prstGeom prst="rect">
             <a:avLst/>
@@ -9163,635 +9635,21 @@
           <a:p>
             <a:pPr algn="l">
               <a:lnSpc>
-                <a:spcPct val="100000"/>
+                <a:spcPct val="120000"/>
               </a:lnSpc>
               <a:spcAft>
                 <a:spcPts val="400"/>
               </a:spcAft>
             </a:pPr>
             <a:r>
-              <a:rPr sz="3000" b="1">
-                <a:solidFill>
-                  <a:srgbClr val="57C28C"/>
-                </a:solidFill>
-                <a:latin typeface="Consolas"/>
-                <a:ea typeface="Consolas"/>
-              </a:rPr>
-              <a:t>→ 0</a:t>
-            </a:r>
-          </a:p>
-        </p:txBody>
-      </p:sp>
-      <p:sp>
-        <p:nvSpPr>
-          <p:cNvPr id="16" name="TextBox 15"/>
-          <p:cNvSpPr txBox="1"/>
-          <p:nvPr/>
-        </p:nvSpPr>
-        <p:spPr>
-          <a:xfrm>
-            <a:off x="9098280" y="2697480"/>
-            <a:ext cx="2194560" cy="411480"/>
-          </a:xfrm>
-          <a:prstGeom prst="rect">
-            <a:avLst/>
-          </a:prstGeom>
-          <a:noFill/>
-        </p:spPr>
-        <p:txBody>
-          <a:bodyPr wrap="square" anchor="t" lIns="0" rIns="0" tIns="0" bIns="0">
-            <a:spAutoFit/>
-          </a:bodyPr>
-          <a:lstStyle/>
-          <a:p>
-            <a:pPr algn="l">
-              <a:lnSpc>
-                <a:spcPct val="105000"/>
-              </a:lnSpc>
-              <a:spcAft>
-                <a:spcPts val="400"/>
-              </a:spcAft>
-            </a:pPr>
-            <a:r>
-              <a:rPr sz="1200" b="0">
+              <a:rPr sz="1300" b="0">
                 <a:solidFill>
                   <a:srgbClr val="A6B6C4"/>
                 </a:solidFill>
                 <a:latin typeface="微软雅黑"/>
                 <a:ea typeface="微软雅黑"/>
               </a:rPr>
-              <a:t>门控 62% 查询后误命中</a:t>
-            </a:r>
-          </a:p>
-        </p:txBody>
-      </p:sp>
-      <p:sp>
-        <p:nvSpPr>
-          <p:cNvPr id="17" name="Rounded Rectangle 16"/>
-          <p:cNvSpPr/>
-          <p:nvPr/>
-        </p:nvSpPr>
-        <p:spPr>
-          <a:xfrm>
-            <a:off x="822960" y="3429000"/>
-            <a:ext cx="10515600" cy="786384"/>
-          </a:xfrm>
-          <a:prstGeom prst="roundRect">
-            <a:avLst/>
-          </a:prstGeom>
-          <a:solidFill>
-            <a:srgbClr val="1A2734"/>
-          </a:solidFill>
-          <a:ln w="12700">
-            <a:solidFill>
-              <a:srgbClr val="2A3A48"/>
-            </a:solidFill>
-          </a:ln>
-          <a:effectLst/>
-        </p:spPr>
-        <p:style>
-          <a:lnRef idx="1">
-            <a:schemeClr val="accent1"/>
-          </a:lnRef>
-          <a:fillRef idx="3">
-            <a:schemeClr val="accent1"/>
-          </a:fillRef>
-          <a:effectRef idx="2">
-            <a:schemeClr val="accent1"/>
-          </a:effectRef>
-          <a:fontRef idx="minor">
-            <a:schemeClr val="lt1"/>
-          </a:fontRef>
-        </p:style>
-        <p:txBody>
-          <a:bodyPr rtlCol="0" anchor="ctr"/>
-          <a:lstStyle/>
-          <a:p>
-            <a:pPr algn="ctr"/>
-          </a:p>
-        </p:txBody>
-      </p:sp>
-      <p:sp>
-        <p:nvSpPr>
-          <p:cNvPr id="18" name="Rectangle 17"/>
-          <p:cNvSpPr/>
-          <p:nvPr/>
-        </p:nvSpPr>
-        <p:spPr>
-          <a:xfrm>
-            <a:off x="822960" y="3429000"/>
-            <a:ext cx="54864" cy="786384"/>
-          </a:xfrm>
-          <a:prstGeom prst="rect">
-            <a:avLst/>
-          </a:prstGeom>
-          <a:solidFill>
-            <a:srgbClr val="35C6BA"/>
-          </a:solidFill>
-          <a:ln>
-            <a:noFill/>
-          </a:ln>
-          <a:effectLst/>
-        </p:spPr>
-        <p:style>
-          <a:lnRef idx="1">
-            <a:schemeClr val="accent1"/>
-          </a:lnRef>
-          <a:fillRef idx="3">
-            <a:schemeClr val="accent1"/>
-          </a:fillRef>
-          <a:effectRef idx="2">
-            <a:schemeClr val="accent1"/>
-          </a:effectRef>
-          <a:fontRef idx="minor">
-            <a:schemeClr val="lt1"/>
-          </a:fontRef>
-        </p:style>
-        <p:txBody>
-          <a:bodyPr rtlCol="0" anchor="ctr"/>
-          <a:lstStyle/>
-          <a:p>
-            <a:pPr algn="ctr"/>
-          </a:p>
-        </p:txBody>
-      </p:sp>
-      <p:sp>
-        <p:nvSpPr>
-          <p:cNvPr id="19" name="TextBox 18"/>
-          <p:cNvSpPr txBox="1"/>
-          <p:nvPr/>
-        </p:nvSpPr>
-        <p:spPr>
-          <a:xfrm>
-            <a:off x="1097280" y="3547872"/>
-            <a:ext cx="3200400" cy="548640"/>
-          </a:xfrm>
-          <a:prstGeom prst="rect">
-            <a:avLst/>
-          </a:prstGeom>
-          <a:noFill/>
-        </p:spPr>
-        <p:txBody>
-          <a:bodyPr wrap="square" anchor="ctr" lIns="0" rIns="0" tIns="0" bIns="0">
-            <a:spAutoFit/>
-          </a:bodyPr>
-          <a:lstStyle/>
-          <a:p>
-            <a:pPr algn="l">
-              <a:lnSpc>
-                <a:spcPct val="100000"/>
-              </a:lnSpc>
-              <a:spcAft>
-                <a:spcPts val="400"/>
-              </a:spcAft>
-            </a:pPr>
-            <a:r>
-              <a:rPr sz="1500" b="1">
-                <a:solidFill>
-                  <a:srgbClr val="35C6BA"/>
-                </a:solidFill>
-                <a:latin typeface="微软雅黑"/>
-                <a:ea typeface="微软雅黑"/>
-              </a:rPr>
-              <a:t>熵预测误命中</a:t>
-            </a:r>
-          </a:p>
-        </p:txBody>
-      </p:sp>
-      <p:sp>
-        <p:nvSpPr>
-          <p:cNvPr id="20" name="TextBox 19"/>
-          <p:cNvSpPr txBox="1"/>
-          <p:nvPr/>
-        </p:nvSpPr>
-        <p:spPr>
-          <a:xfrm>
-            <a:off x="4389120" y="3547872"/>
-            <a:ext cx="6766560" cy="548640"/>
-          </a:xfrm>
-          <a:prstGeom prst="rect">
-            <a:avLst/>
-          </a:prstGeom>
-          <a:noFill/>
-        </p:spPr>
-        <p:txBody>
-          <a:bodyPr wrap="square" anchor="ctr" lIns="0" rIns="0" tIns="0" bIns="0">
-            <a:spAutoFit/>
-          </a:bodyPr>
-          <a:lstStyle/>
-          <a:p>
-            <a:pPr algn="l">
-              <a:lnSpc>
-                <a:spcPct val="105000"/>
-              </a:lnSpc>
-              <a:spcAft>
-                <a:spcPts val="400"/>
-              </a:spcAft>
-            </a:pPr>
-            <a:r>
-              <a:rPr sz="1250" b="0">
-                <a:solidFill>
-                  <a:srgbClr val="A6B6C4"/>
-                </a:solidFill>
-                <a:latin typeface="微软雅黑"/>
-                <a:ea typeface="微软雅黑"/>
-              </a:rPr>
-              <a:t>实测误命中率随熵单调上升：单义码 0% → 高熵码(H&gt;2) 90.6%。</a:t>
-            </a:r>
-          </a:p>
-        </p:txBody>
-      </p:sp>
-      <p:sp>
-        <p:nvSpPr>
-          <p:cNvPr id="21" name="Rounded Rectangle 20"/>
-          <p:cNvSpPr/>
-          <p:nvPr/>
-        </p:nvSpPr>
-        <p:spPr>
-          <a:xfrm>
-            <a:off x="822960" y="4297680"/>
-            <a:ext cx="10515600" cy="786384"/>
-          </a:xfrm>
-          <a:prstGeom prst="roundRect">
-            <a:avLst/>
-          </a:prstGeom>
-          <a:solidFill>
-            <a:srgbClr val="1A2734"/>
-          </a:solidFill>
-          <a:ln w="12700">
-            <a:solidFill>
-              <a:srgbClr val="2A3A48"/>
-            </a:solidFill>
-          </a:ln>
-          <a:effectLst/>
-        </p:spPr>
-        <p:style>
-          <a:lnRef idx="1">
-            <a:schemeClr val="accent1"/>
-          </a:lnRef>
-          <a:fillRef idx="3">
-            <a:schemeClr val="accent1"/>
-          </a:fillRef>
-          <a:effectRef idx="2">
-            <a:schemeClr val="accent1"/>
-          </a:effectRef>
-          <a:fontRef idx="minor">
-            <a:schemeClr val="lt1"/>
-          </a:fontRef>
-        </p:style>
-        <p:txBody>
-          <a:bodyPr rtlCol="0" anchor="ctr"/>
-          <a:lstStyle/>
-          <a:p>
-            <a:pPr algn="ctr"/>
-          </a:p>
-        </p:txBody>
-      </p:sp>
-      <p:sp>
-        <p:nvSpPr>
-          <p:cNvPr id="22" name="Rectangle 21"/>
-          <p:cNvSpPr/>
-          <p:nvPr/>
-        </p:nvSpPr>
-        <p:spPr>
-          <a:xfrm>
-            <a:off x="822960" y="4297680"/>
-            <a:ext cx="54864" cy="786384"/>
-          </a:xfrm>
-          <a:prstGeom prst="rect">
-            <a:avLst/>
-          </a:prstGeom>
-          <a:solidFill>
-            <a:srgbClr val="35C6BA"/>
-          </a:solidFill>
-          <a:ln>
-            <a:noFill/>
-          </a:ln>
-          <a:effectLst/>
-        </p:spPr>
-        <p:style>
-          <a:lnRef idx="1">
-            <a:schemeClr val="accent1"/>
-          </a:lnRef>
-          <a:fillRef idx="3">
-            <a:schemeClr val="accent1"/>
-          </a:fillRef>
-          <a:effectRef idx="2">
-            <a:schemeClr val="accent1"/>
-          </a:effectRef>
-          <a:fontRef idx="minor">
-            <a:schemeClr val="lt1"/>
-          </a:fontRef>
-        </p:style>
-        <p:txBody>
-          <a:bodyPr rtlCol="0" anchor="ctr"/>
-          <a:lstStyle/>
-          <a:p>
-            <a:pPr algn="ctr"/>
-          </a:p>
-        </p:txBody>
-      </p:sp>
-      <p:sp>
-        <p:nvSpPr>
-          <p:cNvPr id="23" name="TextBox 22"/>
-          <p:cNvSpPr txBox="1"/>
-          <p:nvPr/>
-        </p:nvSpPr>
-        <p:spPr>
-          <a:xfrm>
-            <a:off x="1097280" y="4416552"/>
-            <a:ext cx="3200400" cy="548640"/>
-          </a:xfrm>
-          <a:prstGeom prst="rect">
-            <a:avLst/>
-          </a:prstGeom>
-          <a:noFill/>
-        </p:spPr>
-        <p:txBody>
-          <a:bodyPr wrap="square" anchor="ctr" lIns="0" rIns="0" tIns="0" bIns="0">
-            <a:spAutoFit/>
-          </a:bodyPr>
-          <a:lstStyle/>
-          <a:p>
-            <a:pPr algn="l">
-              <a:lnSpc>
-                <a:spcPct val="100000"/>
-              </a:lnSpc>
-              <a:spcAft>
-                <a:spcPts val="400"/>
-              </a:spcAft>
-            </a:pPr>
-            <a:r>
-              <a:rPr sz="1500" b="1">
-                <a:solidFill>
-                  <a:srgbClr val="35C6BA"/>
-                </a:solidFill>
-                <a:latin typeface="微软雅黑"/>
-                <a:ea typeface="微软雅黑"/>
-              </a:rPr>
-              <a:t>门控帕累托最优</a:t>
-            </a:r>
-          </a:p>
-        </p:txBody>
-      </p:sp>
-      <p:sp>
-        <p:nvSpPr>
-          <p:cNvPr id="24" name="TextBox 23"/>
-          <p:cNvSpPr txBox="1"/>
-          <p:nvPr/>
-        </p:nvSpPr>
-        <p:spPr>
-          <a:xfrm>
-            <a:off x="4389120" y="4416552"/>
-            <a:ext cx="6766560" cy="548640"/>
-          </a:xfrm>
-          <a:prstGeom prst="rect">
-            <a:avLst/>
-          </a:prstGeom>
-          <a:noFill/>
-        </p:spPr>
-        <p:txBody>
-          <a:bodyPr wrap="square" anchor="ctr" lIns="0" rIns="0" tIns="0" bIns="0">
-            <a:spAutoFit/>
-          </a:bodyPr>
-          <a:lstStyle/>
-          <a:p>
-            <a:pPr algn="l">
-              <a:lnSpc>
-                <a:spcPct val="105000"/>
-              </a:lnSpc>
-              <a:spcAft>
-                <a:spcPts val="400"/>
-              </a:spcAft>
-            </a:pPr>
-            <a:r>
-              <a:rPr sz="1250" b="0">
-                <a:solidFill>
-                  <a:srgbClr val="A6B6C4"/>
-                </a:solidFill>
-                <a:latin typeface="微软雅黑"/>
-                <a:ea typeface="微软雅黑"/>
-              </a:rPr>
-              <a:t>相同 30% 追问预算下，熵门控残余误命中 24.4% vs 随机 36.2%，多消除 32.5%。</a:t>
-            </a:r>
-          </a:p>
-        </p:txBody>
-      </p:sp>
-      <p:sp>
-        <p:nvSpPr>
-          <p:cNvPr id="25" name="Rounded Rectangle 24"/>
-          <p:cNvSpPr/>
-          <p:nvPr/>
-        </p:nvSpPr>
-        <p:spPr>
-          <a:xfrm>
-            <a:off x="822960" y="5166360"/>
-            <a:ext cx="10515600" cy="786384"/>
-          </a:xfrm>
-          <a:prstGeom prst="roundRect">
-            <a:avLst/>
-          </a:prstGeom>
-          <a:solidFill>
-            <a:srgbClr val="1A2734"/>
-          </a:solidFill>
-          <a:ln w="12700">
-            <a:solidFill>
-              <a:srgbClr val="2A3A48"/>
-            </a:solidFill>
-          </a:ln>
-          <a:effectLst/>
-        </p:spPr>
-        <p:style>
-          <a:lnRef idx="1">
-            <a:schemeClr val="accent1"/>
-          </a:lnRef>
-          <a:fillRef idx="3">
-            <a:schemeClr val="accent1"/>
-          </a:fillRef>
-          <a:effectRef idx="2">
-            <a:schemeClr val="accent1"/>
-          </a:effectRef>
-          <a:fontRef idx="minor">
-            <a:schemeClr val="lt1"/>
-          </a:fontRef>
-        </p:style>
-        <p:txBody>
-          <a:bodyPr rtlCol="0" anchor="ctr"/>
-          <a:lstStyle/>
-          <a:p>
-            <a:pPr algn="ctr"/>
-          </a:p>
-        </p:txBody>
-      </p:sp>
-      <p:sp>
-        <p:nvSpPr>
-          <p:cNvPr id="26" name="Rectangle 25"/>
-          <p:cNvSpPr/>
-          <p:nvPr/>
-        </p:nvSpPr>
-        <p:spPr>
-          <a:xfrm>
-            <a:off x="822960" y="5166360"/>
-            <a:ext cx="54864" cy="786384"/>
-          </a:xfrm>
-          <a:prstGeom prst="rect">
-            <a:avLst/>
-          </a:prstGeom>
-          <a:solidFill>
-            <a:srgbClr val="35C6BA"/>
-          </a:solidFill>
-          <a:ln>
-            <a:noFill/>
-          </a:ln>
-          <a:effectLst/>
-        </p:spPr>
-        <p:style>
-          <a:lnRef idx="1">
-            <a:schemeClr val="accent1"/>
-          </a:lnRef>
-          <a:fillRef idx="3">
-            <a:schemeClr val="accent1"/>
-          </a:fillRef>
-          <a:effectRef idx="2">
-            <a:schemeClr val="accent1"/>
-          </a:effectRef>
-          <a:fontRef idx="minor">
-            <a:schemeClr val="lt1"/>
-          </a:fontRef>
-        </p:style>
-        <p:txBody>
-          <a:bodyPr rtlCol="0" anchor="ctr"/>
-          <a:lstStyle/>
-          <a:p>
-            <a:pPr algn="ctr"/>
-          </a:p>
-        </p:txBody>
-      </p:sp>
-      <p:sp>
-        <p:nvSpPr>
-          <p:cNvPr id="27" name="TextBox 26"/>
-          <p:cNvSpPr txBox="1"/>
-          <p:nvPr/>
-        </p:nvSpPr>
-        <p:spPr>
-          <a:xfrm>
-            <a:off x="1097280" y="5285232"/>
-            <a:ext cx="3200400" cy="548640"/>
-          </a:xfrm>
-          <a:prstGeom prst="rect">
-            <a:avLst/>
-          </a:prstGeom>
-          <a:noFill/>
-        </p:spPr>
-        <p:txBody>
-          <a:bodyPr wrap="square" anchor="ctr" lIns="0" rIns="0" tIns="0" bIns="0">
-            <a:spAutoFit/>
-          </a:bodyPr>
-          <a:lstStyle/>
-          <a:p>
-            <a:pPr algn="l">
-              <a:lnSpc>
-                <a:spcPct val="100000"/>
-              </a:lnSpc>
-              <a:spcAft>
-                <a:spcPts val="400"/>
-              </a:spcAft>
-            </a:pPr>
-            <a:r>
-              <a:rPr sz="1500" b="1">
-                <a:solidFill>
-                  <a:srgbClr val="35C6BA"/>
-                </a:solidFill>
-                <a:latin typeface="微软雅黑"/>
-                <a:ea typeface="微软雅黑"/>
-              </a:rPr>
-              <a:t>增益由熵驱动(独立)</a:t>
-            </a:r>
-          </a:p>
-        </p:txBody>
-      </p:sp>
-      <p:sp>
-        <p:nvSpPr>
-          <p:cNvPr id="28" name="TextBox 27"/>
-          <p:cNvSpPr txBox="1"/>
-          <p:nvPr/>
-        </p:nvSpPr>
-        <p:spPr>
-          <a:xfrm>
-            <a:off x="4389120" y="5285232"/>
-            <a:ext cx="6766560" cy="548640"/>
-          </a:xfrm>
-          <a:prstGeom prst="rect">
-            <a:avLst/>
-          </a:prstGeom>
-          <a:noFill/>
-        </p:spPr>
-        <p:txBody>
-          <a:bodyPr wrap="square" anchor="ctr" lIns="0" rIns="0" tIns="0" bIns="0">
-            <a:spAutoFit/>
-          </a:bodyPr>
-          <a:lstStyle/>
-          <a:p>
-            <a:pPr algn="l">
-              <a:lnSpc>
-                <a:spcPct val="105000"/>
-              </a:lnSpc>
-              <a:spcAft>
-                <a:spcPts val="400"/>
-              </a:spcAft>
-            </a:pPr>
-            <a:r>
-              <a:rPr sz="1250" b="0">
-                <a:solidFill>
-                  <a:srgbClr val="A6B6C4"/>
-                </a:solidFill>
-                <a:latin typeface="微软雅黑"/>
-                <a:ea typeface="微软雅黑"/>
-              </a:rPr>
-              <a:t>'追问机型'的实测增益与熵相关 0.72，高熵码收益是低熵码 3 倍；单义码追问收益为 0。</a:t>
-            </a:r>
-          </a:p>
-        </p:txBody>
-      </p:sp>
-      <p:sp>
-        <p:nvSpPr>
-          <p:cNvPr id="29" name="TextBox 28"/>
-          <p:cNvSpPr txBox="1"/>
-          <p:nvPr/>
-        </p:nvSpPr>
-        <p:spPr>
-          <a:xfrm>
-            <a:off x="822960" y="6172200"/>
-            <a:ext cx="10515600" cy="365760"/>
-          </a:xfrm>
-          <a:prstGeom prst="rect">
-            <a:avLst/>
-          </a:prstGeom>
-          <a:noFill/>
-        </p:spPr>
-        <p:txBody>
-          <a:bodyPr wrap="square" anchor="t" lIns="0" rIns="0" tIns="0" bIns="0">
-            <a:spAutoFit/>
-          </a:bodyPr>
-          <a:lstStyle/>
-          <a:p>
-            <a:pPr algn="l">
-              <a:lnSpc>
-                <a:spcPct val="100000"/>
-              </a:lnSpc>
-              <a:spcAft>
-                <a:spcPts val="400"/>
-              </a:spcAft>
-            </a:pPr>
-            <a:r>
-              <a:rPr sz="1150" b="0">
-                <a:solidFill>
-                  <a:srgbClr val="748696"/>
-                </a:solidFill>
-                <a:latin typeface="微软雅黑"/>
-                <a:ea typeface="微软雅黑"/>
-              </a:rPr>
-              <a:t>诚实说明：留一实测比闭式期望(28.8%基线)严峻但结论一致；23.8% 查询因资料不足弃答，不计误命中。</a:t>
+              <a:t>熵由知识库含义分布闭式算出，无需训练模型、无需调用大模型，适合本地/离线部署。</a:t>
             </a:r>
           </a:p>
         </p:txBody>
@@ -9904,7 +9762,7 @@
                 <a:latin typeface="Consolas"/>
                 <a:ea typeface="Consolas"/>
               </a:rPr>
-              <a:t>06 · 相比流行方法的优势</a:t>
+              <a:t>06 · AEG 有效性 · 留一法真实实测</a:t>
             </a:r>
           </a:p>
         </p:txBody>
@@ -9947,7 +9805,1262 @@
                 <a:latin typeface="微软雅黑"/>
                 <a:ea typeface="微软雅黑"/>
               </a:rPr>
-              <a:t>赢在工程适用性与可解释性，而非模型能力</a:t>
+              <a:t>11,476 条真实故障记录，实测而非理论期望</a:t>
+            </a:r>
+          </a:p>
+        </p:txBody>
+      </p:sp>
+      <p:sp>
+        <p:nvSpPr>
+          <p:cNvPr id="5" name="Rounded Rectangle 4"/>
+          <p:cNvSpPr/>
+          <p:nvPr/>
+        </p:nvSpPr>
+        <p:spPr>
+          <a:xfrm>
+            <a:off x="822960" y="1920240"/>
+            <a:ext cx="2514600" cy="1234440"/>
+          </a:xfrm>
+          <a:prstGeom prst="roundRect">
+            <a:avLst/>
+          </a:prstGeom>
+          <a:solidFill>
+            <a:srgbClr val="1A2734"/>
+          </a:solidFill>
+          <a:ln w="12700">
+            <a:solidFill>
+              <a:srgbClr val="2A3A48"/>
+            </a:solidFill>
+          </a:ln>
+          <a:effectLst/>
+        </p:spPr>
+        <p:style>
+          <a:lnRef idx="1">
+            <a:schemeClr val="accent1"/>
+          </a:lnRef>
+          <a:fillRef idx="3">
+            <a:schemeClr val="accent1"/>
+          </a:fillRef>
+          <a:effectRef idx="2">
+            <a:schemeClr val="accent1"/>
+          </a:effectRef>
+          <a:fontRef idx="minor">
+            <a:schemeClr val="lt1"/>
+          </a:fontRef>
+        </p:style>
+        <p:txBody>
+          <a:bodyPr rtlCol="0" anchor="ctr"/>
+          <a:lstStyle/>
+          <a:p>
+            <a:pPr algn="ctr"/>
+          </a:p>
+        </p:txBody>
+      </p:sp>
+      <p:sp>
+        <p:nvSpPr>
+          <p:cNvPr id="6" name="TextBox 5"/>
+          <p:cNvSpPr txBox="1"/>
+          <p:nvPr/>
+        </p:nvSpPr>
+        <p:spPr>
+          <a:xfrm>
+            <a:off x="1005840" y="2121408"/>
+            <a:ext cx="2194560" cy="548640"/>
+          </a:xfrm>
+          <a:prstGeom prst="rect">
+            <a:avLst/>
+          </a:prstGeom>
+          <a:noFill/>
+        </p:spPr>
+        <p:txBody>
+          <a:bodyPr wrap="square" anchor="t" lIns="0" rIns="0" tIns="0" bIns="0">
+            <a:spAutoFit/>
+          </a:bodyPr>
+          <a:lstStyle/>
+          <a:p>
+            <a:pPr algn="l">
+              <a:lnSpc>
+                <a:spcPct val="100000"/>
+              </a:lnSpc>
+              <a:spcAft>
+                <a:spcPts val="400"/>
+              </a:spcAft>
+            </a:pPr>
+            <a:r>
+              <a:rPr sz="3000" b="1">
+                <a:solidFill>
+                  <a:srgbClr val="E0A94A"/>
+                </a:solidFill>
+                <a:latin typeface="Consolas"/>
+                <a:ea typeface="Consolas"/>
+              </a:rPr>
+              <a:t>51.7%</a:t>
+            </a:r>
+          </a:p>
+        </p:txBody>
+      </p:sp>
+      <p:sp>
+        <p:nvSpPr>
+          <p:cNvPr id="7" name="TextBox 6"/>
+          <p:cNvSpPr txBox="1"/>
+          <p:nvPr/>
+        </p:nvSpPr>
+        <p:spPr>
+          <a:xfrm>
+            <a:off x="1005840" y="2697480"/>
+            <a:ext cx="2194560" cy="411480"/>
+          </a:xfrm>
+          <a:prstGeom prst="rect">
+            <a:avLst/>
+          </a:prstGeom>
+          <a:noFill/>
+        </p:spPr>
+        <p:txBody>
+          <a:bodyPr wrap="square" anchor="t" lIns="0" rIns="0" tIns="0" bIns="0">
+            <a:spAutoFit/>
+          </a:bodyPr>
+          <a:lstStyle/>
+          <a:p>
+            <a:pPr algn="l">
+              <a:lnSpc>
+                <a:spcPct val="105000"/>
+              </a:lnSpc>
+              <a:spcAft>
+                <a:spcPts val="400"/>
+              </a:spcAft>
+            </a:pPr>
+            <a:r>
+              <a:rPr sz="1200" b="0">
+                <a:solidFill>
+                  <a:srgbClr val="A6B6C4"/>
+                </a:solidFill>
+                <a:latin typeface="微软雅黑"/>
+                <a:ea typeface="微软雅黑"/>
+              </a:rPr>
+              <a:t>留一实测基线误命中</a:t>
+            </a:r>
+          </a:p>
+        </p:txBody>
+      </p:sp>
+      <p:sp>
+        <p:nvSpPr>
+          <p:cNvPr id="8" name="Rounded Rectangle 7"/>
+          <p:cNvSpPr/>
+          <p:nvPr/>
+        </p:nvSpPr>
+        <p:spPr>
+          <a:xfrm>
+            <a:off x="3520440" y="1920240"/>
+            <a:ext cx="2514600" cy="1234440"/>
+          </a:xfrm>
+          <a:prstGeom prst="roundRect">
+            <a:avLst/>
+          </a:prstGeom>
+          <a:solidFill>
+            <a:srgbClr val="1A2734"/>
+          </a:solidFill>
+          <a:ln w="12700">
+            <a:solidFill>
+              <a:srgbClr val="2A3A48"/>
+            </a:solidFill>
+          </a:ln>
+          <a:effectLst/>
+        </p:spPr>
+        <p:style>
+          <a:lnRef idx="1">
+            <a:schemeClr val="accent1"/>
+          </a:lnRef>
+          <a:fillRef idx="3">
+            <a:schemeClr val="accent1"/>
+          </a:fillRef>
+          <a:effectRef idx="2">
+            <a:schemeClr val="accent1"/>
+          </a:effectRef>
+          <a:fontRef idx="minor">
+            <a:schemeClr val="lt1"/>
+          </a:fontRef>
+        </p:style>
+        <p:txBody>
+          <a:bodyPr rtlCol="0" anchor="ctr"/>
+          <a:lstStyle/>
+          <a:p>
+            <a:pPr algn="ctr"/>
+          </a:p>
+        </p:txBody>
+      </p:sp>
+      <p:sp>
+        <p:nvSpPr>
+          <p:cNvPr id="9" name="TextBox 8"/>
+          <p:cNvSpPr txBox="1"/>
+          <p:nvPr/>
+        </p:nvSpPr>
+        <p:spPr>
+          <a:xfrm>
+            <a:off x="3703320" y="2121408"/>
+            <a:ext cx="2194560" cy="548640"/>
+          </a:xfrm>
+          <a:prstGeom prst="rect">
+            <a:avLst/>
+          </a:prstGeom>
+          <a:noFill/>
+        </p:spPr>
+        <p:txBody>
+          <a:bodyPr wrap="square" anchor="t" lIns="0" rIns="0" tIns="0" bIns="0">
+            <a:spAutoFit/>
+          </a:bodyPr>
+          <a:lstStyle/>
+          <a:p>
+            <a:pPr algn="l">
+              <a:lnSpc>
+                <a:spcPct val="100000"/>
+              </a:lnSpc>
+              <a:spcAft>
+                <a:spcPts val="400"/>
+              </a:spcAft>
+            </a:pPr>
+            <a:r>
+              <a:rPr sz="3000" b="1">
+                <a:solidFill>
+                  <a:srgbClr val="35C6BA"/>
+                </a:solidFill>
+                <a:latin typeface="Consolas"/>
+                <a:ea typeface="Consolas"/>
+              </a:rPr>
+              <a:t>0.92</a:t>
+            </a:r>
+          </a:p>
+        </p:txBody>
+      </p:sp>
+      <p:sp>
+        <p:nvSpPr>
+          <p:cNvPr id="10" name="TextBox 9"/>
+          <p:cNvSpPr txBox="1"/>
+          <p:nvPr/>
+        </p:nvSpPr>
+        <p:spPr>
+          <a:xfrm>
+            <a:off x="3703320" y="2697480"/>
+            <a:ext cx="2194560" cy="411480"/>
+          </a:xfrm>
+          <a:prstGeom prst="rect">
+            <a:avLst/>
+          </a:prstGeom>
+          <a:noFill/>
+        </p:spPr>
+        <p:txBody>
+          <a:bodyPr wrap="square" anchor="t" lIns="0" rIns="0" tIns="0" bIns="0">
+            <a:spAutoFit/>
+          </a:bodyPr>
+          <a:lstStyle/>
+          <a:p>
+            <a:pPr algn="l">
+              <a:lnSpc>
+                <a:spcPct val="105000"/>
+              </a:lnSpc>
+              <a:spcAft>
+                <a:spcPts val="400"/>
+              </a:spcAft>
+            </a:pPr>
+            <a:r>
+              <a:rPr sz="1200" b="0">
+                <a:solidFill>
+                  <a:srgbClr val="A6B6C4"/>
+                </a:solidFill>
+                <a:latin typeface="微软雅黑"/>
+                <a:ea typeface="微软雅黑"/>
+              </a:rPr>
+              <a:t>熵·误命中 Spearman</a:t>
+            </a:r>
+          </a:p>
+        </p:txBody>
+      </p:sp>
+      <p:sp>
+        <p:nvSpPr>
+          <p:cNvPr id="11" name="Rounded Rectangle 10"/>
+          <p:cNvSpPr/>
+          <p:nvPr/>
+        </p:nvSpPr>
+        <p:spPr>
+          <a:xfrm>
+            <a:off x="6217920" y="1920240"/>
+            <a:ext cx="2514600" cy="1234440"/>
+          </a:xfrm>
+          <a:prstGeom prst="roundRect">
+            <a:avLst/>
+          </a:prstGeom>
+          <a:solidFill>
+            <a:srgbClr val="1A2734"/>
+          </a:solidFill>
+          <a:ln w="12700">
+            <a:solidFill>
+              <a:srgbClr val="2A3A48"/>
+            </a:solidFill>
+          </a:ln>
+          <a:effectLst/>
+        </p:spPr>
+        <p:style>
+          <a:lnRef idx="1">
+            <a:schemeClr val="accent1"/>
+          </a:lnRef>
+          <a:fillRef idx="3">
+            <a:schemeClr val="accent1"/>
+          </a:fillRef>
+          <a:effectRef idx="2">
+            <a:schemeClr val="accent1"/>
+          </a:effectRef>
+          <a:fontRef idx="minor">
+            <a:schemeClr val="lt1"/>
+          </a:fontRef>
+        </p:style>
+        <p:txBody>
+          <a:bodyPr rtlCol="0" anchor="ctr"/>
+          <a:lstStyle/>
+          <a:p>
+            <a:pPr algn="ctr"/>
+          </a:p>
+        </p:txBody>
+      </p:sp>
+      <p:sp>
+        <p:nvSpPr>
+          <p:cNvPr id="12" name="TextBox 11"/>
+          <p:cNvSpPr txBox="1"/>
+          <p:nvPr/>
+        </p:nvSpPr>
+        <p:spPr>
+          <a:xfrm>
+            <a:off x="6400800" y="2121408"/>
+            <a:ext cx="2194560" cy="548640"/>
+          </a:xfrm>
+          <a:prstGeom prst="rect">
+            <a:avLst/>
+          </a:prstGeom>
+          <a:noFill/>
+        </p:spPr>
+        <p:txBody>
+          <a:bodyPr wrap="square" anchor="t" lIns="0" rIns="0" tIns="0" bIns="0">
+            <a:spAutoFit/>
+          </a:bodyPr>
+          <a:lstStyle/>
+          <a:p>
+            <a:pPr algn="l">
+              <a:lnSpc>
+                <a:spcPct val="100000"/>
+              </a:lnSpc>
+              <a:spcAft>
+                <a:spcPts val="400"/>
+              </a:spcAft>
+            </a:pPr>
+            <a:r>
+              <a:rPr sz="3000" b="1">
+                <a:solidFill>
+                  <a:srgbClr val="35C6BA"/>
+                </a:solidFill>
+                <a:latin typeface="Consolas"/>
+                <a:ea typeface="Consolas"/>
+              </a:rPr>
+              <a:t>0.72</a:t>
+            </a:r>
+          </a:p>
+        </p:txBody>
+      </p:sp>
+      <p:sp>
+        <p:nvSpPr>
+          <p:cNvPr id="13" name="TextBox 12"/>
+          <p:cNvSpPr txBox="1"/>
+          <p:nvPr/>
+        </p:nvSpPr>
+        <p:spPr>
+          <a:xfrm>
+            <a:off x="6400800" y="2697480"/>
+            <a:ext cx="2194560" cy="411480"/>
+          </a:xfrm>
+          <a:prstGeom prst="rect">
+            <a:avLst/>
+          </a:prstGeom>
+          <a:noFill/>
+        </p:spPr>
+        <p:txBody>
+          <a:bodyPr wrap="square" anchor="t" lIns="0" rIns="0" tIns="0" bIns="0">
+            <a:spAutoFit/>
+          </a:bodyPr>
+          <a:lstStyle/>
+          <a:p>
+            <a:pPr algn="l">
+              <a:lnSpc>
+                <a:spcPct val="105000"/>
+              </a:lnSpc>
+              <a:spcAft>
+                <a:spcPts val="400"/>
+              </a:spcAft>
+            </a:pPr>
+            <a:r>
+              <a:rPr sz="1200" b="0">
+                <a:solidFill>
+                  <a:srgbClr val="A6B6C4"/>
+                </a:solidFill>
+                <a:latin typeface="微软雅黑"/>
+                <a:ea typeface="微软雅黑"/>
+              </a:rPr>
+              <a:t>熵·增益 相关(独立验证)</a:t>
+            </a:r>
+          </a:p>
+        </p:txBody>
+      </p:sp>
+      <p:sp>
+        <p:nvSpPr>
+          <p:cNvPr id="14" name="Rounded Rectangle 13"/>
+          <p:cNvSpPr/>
+          <p:nvPr/>
+        </p:nvSpPr>
+        <p:spPr>
+          <a:xfrm>
+            <a:off x="8915400" y="1920240"/>
+            <a:ext cx="2514600" cy="1234440"/>
+          </a:xfrm>
+          <a:prstGeom prst="roundRect">
+            <a:avLst/>
+          </a:prstGeom>
+          <a:solidFill>
+            <a:srgbClr val="1A2734"/>
+          </a:solidFill>
+          <a:ln w="12700">
+            <a:solidFill>
+              <a:srgbClr val="2A3A48"/>
+            </a:solidFill>
+          </a:ln>
+          <a:effectLst/>
+        </p:spPr>
+        <p:style>
+          <a:lnRef idx="1">
+            <a:schemeClr val="accent1"/>
+          </a:lnRef>
+          <a:fillRef idx="3">
+            <a:schemeClr val="accent1"/>
+          </a:fillRef>
+          <a:effectRef idx="2">
+            <a:schemeClr val="accent1"/>
+          </a:effectRef>
+          <a:fontRef idx="minor">
+            <a:schemeClr val="lt1"/>
+          </a:fontRef>
+        </p:style>
+        <p:txBody>
+          <a:bodyPr rtlCol="0" anchor="ctr"/>
+          <a:lstStyle/>
+          <a:p>
+            <a:pPr algn="ctr"/>
+          </a:p>
+        </p:txBody>
+      </p:sp>
+      <p:sp>
+        <p:nvSpPr>
+          <p:cNvPr id="15" name="TextBox 14"/>
+          <p:cNvSpPr txBox="1"/>
+          <p:nvPr/>
+        </p:nvSpPr>
+        <p:spPr>
+          <a:xfrm>
+            <a:off x="9098280" y="2121408"/>
+            <a:ext cx="2194560" cy="548640"/>
+          </a:xfrm>
+          <a:prstGeom prst="rect">
+            <a:avLst/>
+          </a:prstGeom>
+          <a:noFill/>
+        </p:spPr>
+        <p:txBody>
+          <a:bodyPr wrap="square" anchor="t" lIns="0" rIns="0" tIns="0" bIns="0">
+            <a:spAutoFit/>
+          </a:bodyPr>
+          <a:lstStyle/>
+          <a:p>
+            <a:pPr algn="l">
+              <a:lnSpc>
+                <a:spcPct val="100000"/>
+              </a:lnSpc>
+              <a:spcAft>
+                <a:spcPts val="400"/>
+              </a:spcAft>
+            </a:pPr>
+            <a:r>
+              <a:rPr sz="3000" b="1">
+                <a:solidFill>
+                  <a:srgbClr val="57C28C"/>
+                </a:solidFill>
+                <a:latin typeface="Consolas"/>
+                <a:ea typeface="Consolas"/>
+              </a:rPr>
+              <a:t>→ 0</a:t>
+            </a:r>
+          </a:p>
+        </p:txBody>
+      </p:sp>
+      <p:sp>
+        <p:nvSpPr>
+          <p:cNvPr id="16" name="TextBox 15"/>
+          <p:cNvSpPr txBox="1"/>
+          <p:nvPr/>
+        </p:nvSpPr>
+        <p:spPr>
+          <a:xfrm>
+            <a:off x="9098280" y="2697480"/>
+            <a:ext cx="2194560" cy="411480"/>
+          </a:xfrm>
+          <a:prstGeom prst="rect">
+            <a:avLst/>
+          </a:prstGeom>
+          <a:noFill/>
+        </p:spPr>
+        <p:txBody>
+          <a:bodyPr wrap="square" anchor="t" lIns="0" rIns="0" tIns="0" bIns="0">
+            <a:spAutoFit/>
+          </a:bodyPr>
+          <a:lstStyle/>
+          <a:p>
+            <a:pPr algn="l">
+              <a:lnSpc>
+                <a:spcPct val="105000"/>
+              </a:lnSpc>
+              <a:spcAft>
+                <a:spcPts val="400"/>
+              </a:spcAft>
+            </a:pPr>
+            <a:r>
+              <a:rPr sz="1200" b="0">
+                <a:solidFill>
+                  <a:srgbClr val="A6B6C4"/>
+                </a:solidFill>
+                <a:latin typeface="微软雅黑"/>
+                <a:ea typeface="微软雅黑"/>
+              </a:rPr>
+              <a:t>门控 62% 查询后误命中</a:t>
+            </a:r>
+          </a:p>
+        </p:txBody>
+      </p:sp>
+      <p:sp>
+        <p:nvSpPr>
+          <p:cNvPr id="17" name="Rounded Rectangle 16"/>
+          <p:cNvSpPr/>
+          <p:nvPr/>
+        </p:nvSpPr>
+        <p:spPr>
+          <a:xfrm>
+            <a:off x="822960" y="3429000"/>
+            <a:ext cx="10515600" cy="786384"/>
+          </a:xfrm>
+          <a:prstGeom prst="roundRect">
+            <a:avLst/>
+          </a:prstGeom>
+          <a:solidFill>
+            <a:srgbClr val="1A2734"/>
+          </a:solidFill>
+          <a:ln w="12700">
+            <a:solidFill>
+              <a:srgbClr val="2A3A48"/>
+            </a:solidFill>
+          </a:ln>
+          <a:effectLst/>
+        </p:spPr>
+        <p:style>
+          <a:lnRef idx="1">
+            <a:schemeClr val="accent1"/>
+          </a:lnRef>
+          <a:fillRef idx="3">
+            <a:schemeClr val="accent1"/>
+          </a:fillRef>
+          <a:effectRef idx="2">
+            <a:schemeClr val="accent1"/>
+          </a:effectRef>
+          <a:fontRef idx="minor">
+            <a:schemeClr val="lt1"/>
+          </a:fontRef>
+        </p:style>
+        <p:txBody>
+          <a:bodyPr rtlCol="0" anchor="ctr"/>
+          <a:lstStyle/>
+          <a:p>
+            <a:pPr algn="ctr"/>
+          </a:p>
+        </p:txBody>
+      </p:sp>
+      <p:sp>
+        <p:nvSpPr>
+          <p:cNvPr id="18" name="Rectangle 17"/>
+          <p:cNvSpPr/>
+          <p:nvPr/>
+        </p:nvSpPr>
+        <p:spPr>
+          <a:xfrm>
+            <a:off x="822960" y="3429000"/>
+            <a:ext cx="54864" cy="786384"/>
+          </a:xfrm>
+          <a:prstGeom prst="rect">
+            <a:avLst/>
+          </a:prstGeom>
+          <a:solidFill>
+            <a:srgbClr val="35C6BA"/>
+          </a:solidFill>
+          <a:ln>
+            <a:noFill/>
+          </a:ln>
+          <a:effectLst/>
+        </p:spPr>
+        <p:style>
+          <a:lnRef idx="1">
+            <a:schemeClr val="accent1"/>
+          </a:lnRef>
+          <a:fillRef idx="3">
+            <a:schemeClr val="accent1"/>
+          </a:fillRef>
+          <a:effectRef idx="2">
+            <a:schemeClr val="accent1"/>
+          </a:effectRef>
+          <a:fontRef idx="minor">
+            <a:schemeClr val="lt1"/>
+          </a:fontRef>
+        </p:style>
+        <p:txBody>
+          <a:bodyPr rtlCol="0" anchor="ctr"/>
+          <a:lstStyle/>
+          <a:p>
+            <a:pPr algn="ctr"/>
+          </a:p>
+        </p:txBody>
+      </p:sp>
+      <p:sp>
+        <p:nvSpPr>
+          <p:cNvPr id="19" name="TextBox 18"/>
+          <p:cNvSpPr txBox="1"/>
+          <p:nvPr/>
+        </p:nvSpPr>
+        <p:spPr>
+          <a:xfrm>
+            <a:off x="1097280" y="3547872"/>
+            <a:ext cx="3200400" cy="548640"/>
+          </a:xfrm>
+          <a:prstGeom prst="rect">
+            <a:avLst/>
+          </a:prstGeom>
+          <a:noFill/>
+        </p:spPr>
+        <p:txBody>
+          <a:bodyPr wrap="square" anchor="ctr" lIns="0" rIns="0" tIns="0" bIns="0">
+            <a:spAutoFit/>
+          </a:bodyPr>
+          <a:lstStyle/>
+          <a:p>
+            <a:pPr algn="l">
+              <a:lnSpc>
+                <a:spcPct val="100000"/>
+              </a:lnSpc>
+              <a:spcAft>
+                <a:spcPts val="400"/>
+              </a:spcAft>
+            </a:pPr>
+            <a:r>
+              <a:rPr sz="1500" b="1">
+                <a:solidFill>
+                  <a:srgbClr val="35C6BA"/>
+                </a:solidFill>
+                <a:latin typeface="微软雅黑"/>
+                <a:ea typeface="微软雅黑"/>
+              </a:rPr>
+              <a:t>熵预测误命中</a:t>
+            </a:r>
+          </a:p>
+        </p:txBody>
+      </p:sp>
+      <p:sp>
+        <p:nvSpPr>
+          <p:cNvPr id="20" name="TextBox 19"/>
+          <p:cNvSpPr txBox="1"/>
+          <p:nvPr/>
+        </p:nvSpPr>
+        <p:spPr>
+          <a:xfrm>
+            <a:off x="4389120" y="3547872"/>
+            <a:ext cx="6766560" cy="548640"/>
+          </a:xfrm>
+          <a:prstGeom prst="rect">
+            <a:avLst/>
+          </a:prstGeom>
+          <a:noFill/>
+        </p:spPr>
+        <p:txBody>
+          <a:bodyPr wrap="square" anchor="ctr" lIns="0" rIns="0" tIns="0" bIns="0">
+            <a:spAutoFit/>
+          </a:bodyPr>
+          <a:lstStyle/>
+          <a:p>
+            <a:pPr algn="l">
+              <a:lnSpc>
+                <a:spcPct val="105000"/>
+              </a:lnSpc>
+              <a:spcAft>
+                <a:spcPts val="400"/>
+              </a:spcAft>
+            </a:pPr>
+            <a:r>
+              <a:rPr sz="1250" b="0">
+                <a:solidFill>
+                  <a:srgbClr val="A6B6C4"/>
+                </a:solidFill>
+                <a:latin typeface="微软雅黑"/>
+                <a:ea typeface="微软雅黑"/>
+              </a:rPr>
+              <a:t>实测误命中率随熵单调上升：单义码 0% → 高熵码(H&gt;2) 90.6%。</a:t>
+            </a:r>
+          </a:p>
+        </p:txBody>
+      </p:sp>
+      <p:sp>
+        <p:nvSpPr>
+          <p:cNvPr id="21" name="Rounded Rectangle 20"/>
+          <p:cNvSpPr/>
+          <p:nvPr/>
+        </p:nvSpPr>
+        <p:spPr>
+          <a:xfrm>
+            <a:off x="822960" y="4297680"/>
+            <a:ext cx="10515600" cy="786384"/>
+          </a:xfrm>
+          <a:prstGeom prst="roundRect">
+            <a:avLst/>
+          </a:prstGeom>
+          <a:solidFill>
+            <a:srgbClr val="1A2734"/>
+          </a:solidFill>
+          <a:ln w="12700">
+            <a:solidFill>
+              <a:srgbClr val="2A3A48"/>
+            </a:solidFill>
+          </a:ln>
+          <a:effectLst/>
+        </p:spPr>
+        <p:style>
+          <a:lnRef idx="1">
+            <a:schemeClr val="accent1"/>
+          </a:lnRef>
+          <a:fillRef idx="3">
+            <a:schemeClr val="accent1"/>
+          </a:fillRef>
+          <a:effectRef idx="2">
+            <a:schemeClr val="accent1"/>
+          </a:effectRef>
+          <a:fontRef idx="minor">
+            <a:schemeClr val="lt1"/>
+          </a:fontRef>
+        </p:style>
+        <p:txBody>
+          <a:bodyPr rtlCol="0" anchor="ctr"/>
+          <a:lstStyle/>
+          <a:p>
+            <a:pPr algn="ctr"/>
+          </a:p>
+        </p:txBody>
+      </p:sp>
+      <p:sp>
+        <p:nvSpPr>
+          <p:cNvPr id="22" name="Rectangle 21"/>
+          <p:cNvSpPr/>
+          <p:nvPr/>
+        </p:nvSpPr>
+        <p:spPr>
+          <a:xfrm>
+            <a:off x="822960" y="4297680"/>
+            <a:ext cx="54864" cy="786384"/>
+          </a:xfrm>
+          <a:prstGeom prst="rect">
+            <a:avLst/>
+          </a:prstGeom>
+          <a:solidFill>
+            <a:srgbClr val="35C6BA"/>
+          </a:solidFill>
+          <a:ln>
+            <a:noFill/>
+          </a:ln>
+          <a:effectLst/>
+        </p:spPr>
+        <p:style>
+          <a:lnRef idx="1">
+            <a:schemeClr val="accent1"/>
+          </a:lnRef>
+          <a:fillRef idx="3">
+            <a:schemeClr val="accent1"/>
+          </a:fillRef>
+          <a:effectRef idx="2">
+            <a:schemeClr val="accent1"/>
+          </a:effectRef>
+          <a:fontRef idx="minor">
+            <a:schemeClr val="lt1"/>
+          </a:fontRef>
+        </p:style>
+        <p:txBody>
+          <a:bodyPr rtlCol="0" anchor="ctr"/>
+          <a:lstStyle/>
+          <a:p>
+            <a:pPr algn="ctr"/>
+          </a:p>
+        </p:txBody>
+      </p:sp>
+      <p:sp>
+        <p:nvSpPr>
+          <p:cNvPr id="23" name="TextBox 22"/>
+          <p:cNvSpPr txBox="1"/>
+          <p:nvPr/>
+        </p:nvSpPr>
+        <p:spPr>
+          <a:xfrm>
+            <a:off x="1097280" y="4416552"/>
+            <a:ext cx="3200400" cy="548640"/>
+          </a:xfrm>
+          <a:prstGeom prst="rect">
+            <a:avLst/>
+          </a:prstGeom>
+          <a:noFill/>
+        </p:spPr>
+        <p:txBody>
+          <a:bodyPr wrap="square" anchor="ctr" lIns="0" rIns="0" tIns="0" bIns="0">
+            <a:spAutoFit/>
+          </a:bodyPr>
+          <a:lstStyle/>
+          <a:p>
+            <a:pPr algn="l">
+              <a:lnSpc>
+                <a:spcPct val="100000"/>
+              </a:lnSpc>
+              <a:spcAft>
+                <a:spcPts val="400"/>
+              </a:spcAft>
+            </a:pPr>
+            <a:r>
+              <a:rPr sz="1500" b="1">
+                <a:solidFill>
+                  <a:srgbClr val="35C6BA"/>
+                </a:solidFill>
+                <a:latin typeface="微软雅黑"/>
+                <a:ea typeface="微软雅黑"/>
+              </a:rPr>
+              <a:t>门控帕累托最优</a:t>
+            </a:r>
+          </a:p>
+        </p:txBody>
+      </p:sp>
+      <p:sp>
+        <p:nvSpPr>
+          <p:cNvPr id="24" name="TextBox 23"/>
+          <p:cNvSpPr txBox="1"/>
+          <p:nvPr/>
+        </p:nvSpPr>
+        <p:spPr>
+          <a:xfrm>
+            <a:off x="4389120" y="4416552"/>
+            <a:ext cx="6766560" cy="548640"/>
+          </a:xfrm>
+          <a:prstGeom prst="rect">
+            <a:avLst/>
+          </a:prstGeom>
+          <a:noFill/>
+        </p:spPr>
+        <p:txBody>
+          <a:bodyPr wrap="square" anchor="ctr" lIns="0" rIns="0" tIns="0" bIns="0">
+            <a:spAutoFit/>
+          </a:bodyPr>
+          <a:lstStyle/>
+          <a:p>
+            <a:pPr algn="l">
+              <a:lnSpc>
+                <a:spcPct val="105000"/>
+              </a:lnSpc>
+              <a:spcAft>
+                <a:spcPts val="400"/>
+              </a:spcAft>
+            </a:pPr>
+            <a:r>
+              <a:rPr sz="1250" b="0">
+                <a:solidFill>
+                  <a:srgbClr val="A6B6C4"/>
+                </a:solidFill>
+                <a:latin typeface="微软雅黑"/>
+                <a:ea typeface="微软雅黑"/>
+              </a:rPr>
+              <a:t>相同 30% 追问预算下，熵门控残余误命中 24.4% vs 随机 36.2%，多消除 32.5%。</a:t>
+            </a:r>
+          </a:p>
+        </p:txBody>
+      </p:sp>
+      <p:sp>
+        <p:nvSpPr>
+          <p:cNvPr id="25" name="Rounded Rectangle 24"/>
+          <p:cNvSpPr/>
+          <p:nvPr/>
+        </p:nvSpPr>
+        <p:spPr>
+          <a:xfrm>
+            <a:off x="822960" y="5166360"/>
+            <a:ext cx="10515600" cy="786384"/>
+          </a:xfrm>
+          <a:prstGeom prst="roundRect">
+            <a:avLst/>
+          </a:prstGeom>
+          <a:solidFill>
+            <a:srgbClr val="1A2734"/>
+          </a:solidFill>
+          <a:ln w="12700">
+            <a:solidFill>
+              <a:srgbClr val="2A3A48"/>
+            </a:solidFill>
+          </a:ln>
+          <a:effectLst/>
+        </p:spPr>
+        <p:style>
+          <a:lnRef idx="1">
+            <a:schemeClr val="accent1"/>
+          </a:lnRef>
+          <a:fillRef idx="3">
+            <a:schemeClr val="accent1"/>
+          </a:fillRef>
+          <a:effectRef idx="2">
+            <a:schemeClr val="accent1"/>
+          </a:effectRef>
+          <a:fontRef idx="minor">
+            <a:schemeClr val="lt1"/>
+          </a:fontRef>
+        </p:style>
+        <p:txBody>
+          <a:bodyPr rtlCol="0" anchor="ctr"/>
+          <a:lstStyle/>
+          <a:p>
+            <a:pPr algn="ctr"/>
+          </a:p>
+        </p:txBody>
+      </p:sp>
+      <p:sp>
+        <p:nvSpPr>
+          <p:cNvPr id="26" name="Rectangle 25"/>
+          <p:cNvSpPr/>
+          <p:nvPr/>
+        </p:nvSpPr>
+        <p:spPr>
+          <a:xfrm>
+            <a:off x="822960" y="5166360"/>
+            <a:ext cx="54864" cy="786384"/>
+          </a:xfrm>
+          <a:prstGeom prst="rect">
+            <a:avLst/>
+          </a:prstGeom>
+          <a:solidFill>
+            <a:srgbClr val="35C6BA"/>
+          </a:solidFill>
+          <a:ln>
+            <a:noFill/>
+          </a:ln>
+          <a:effectLst/>
+        </p:spPr>
+        <p:style>
+          <a:lnRef idx="1">
+            <a:schemeClr val="accent1"/>
+          </a:lnRef>
+          <a:fillRef idx="3">
+            <a:schemeClr val="accent1"/>
+          </a:fillRef>
+          <a:effectRef idx="2">
+            <a:schemeClr val="accent1"/>
+          </a:effectRef>
+          <a:fontRef idx="minor">
+            <a:schemeClr val="lt1"/>
+          </a:fontRef>
+        </p:style>
+        <p:txBody>
+          <a:bodyPr rtlCol="0" anchor="ctr"/>
+          <a:lstStyle/>
+          <a:p>
+            <a:pPr algn="ctr"/>
+          </a:p>
+        </p:txBody>
+      </p:sp>
+      <p:sp>
+        <p:nvSpPr>
+          <p:cNvPr id="27" name="TextBox 26"/>
+          <p:cNvSpPr txBox="1"/>
+          <p:nvPr/>
+        </p:nvSpPr>
+        <p:spPr>
+          <a:xfrm>
+            <a:off x="1097280" y="5285232"/>
+            <a:ext cx="3200400" cy="548640"/>
+          </a:xfrm>
+          <a:prstGeom prst="rect">
+            <a:avLst/>
+          </a:prstGeom>
+          <a:noFill/>
+        </p:spPr>
+        <p:txBody>
+          <a:bodyPr wrap="square" anchor="ctr" lIns="0" rIns="0" tIns="0" bIns="0">
+            <a:spAutoFit/>
+          </a:bodyPr>
+          <a:lstStyle/>
+          <a:p>
+            <a:pPr algn="l">
+              <a:lnSpc>
+                <a:spcPct val="100000"/>
+              </a:lnSpc>
+              <a:spcAft>
+                <a:spcPts val="400"/>
+              </a:spcAft>
+            </a:pPr>
+            <a:r>
+              <a:rPr sz="1500" b="1">
+                <a:solidFill>
+                  <a:srgbClr val="35C6BA"/>
+                </a:solidFill>
+                <a:latin typeface="微软雅黑"/>
+                <a:ea typeface="微软雅黑"/>
+              </a:rPr>
+              <a:t>增益由熵驱动(独立)</a:t>
+            </a:r>
+          </a:p>
+        </p:txBody>
+      </p:sp>
+      <p:sp>
+        <p:nvSpPr>
+          <p:cNvPr id="28" name="TextBox 27"/>
+          <p:cNvSpPr txBox="1"/>
+          <p:nvPr/>
+        </p:nvSpPr>
+        <p:spPr>
+          <a:xfrm>
+            <a:off x="4389120" y="5285232"/>
+            <a:ext cx="6766560" cy="548640"/>
+          </a:xfrm>
+          <a:prstGeom prst="rect">
+            <a:avLst/>
+          </a:prstGeom>
+          <a:noFill/>
+        </p:spPr>
+        <p:txBody>
+          <a:bodyPr wrap="square" anchor="ctr" lIns="0" rIns="0" tIns="0" bIns="0">
+            <a:spAutoFit/>
+          </a:bodyPr>
+          <a:lstStyle/>
+          <a:p>
+            <a:pPr algn="l">
+              <a:lnSpc>
+                <a:spcPct val="105000"/>
+              </a:lnSpc>
+              <a:spcAft>
+                <a:spcPts val="400"/>
+              </a:spcAft>
+            </a:pPr>
+            <a:r>
+              <a:rPr sz="1250" b="0">
+                <a:solidFill>
+                  <a:srgbClr val="A6B6C4"/>
+                </a:solidFill>
+                <a:latin typeface="微软雅黑"/>
+                <a:ea typeface="微软雅黑"/>
+              </a:rPr>
+              <a:t>'追问机型'的实测增益与熵相关 0.72，高熵码收益是低熵码 3 倍；单义码追问收益为 0。</a:t>
+            </a:r>
+          </a:p>
+        </p:txBody>
+      </p:sp>
+      <p:sp>
+        <p:nvSpPr>
+          <p:cNvPr id="29" name="TextBox 28"/>
+          <p:cNvSpPr txBox="1"/>
+          <p:nvPr/>
+        </p:nvSpPr>
+        <p:spPr>
+          <a:xfrm>
+            <a:off x="822960" y="6172200"/>
+            <a:ext cx="10515600" cy="365760"/>
+          </a:xfrm>
+          <a:prstGeom prst="rect">
+            <a:avLst/>
+          </a:prstGeom>
+          <a:noFill/>
+        </p:spPr>
+        <p:txBody>
+          <a:bodyPr wrap="square" anchor="t" lIns="0" rIns="0" tIns="0" bIns="0">
+            <a:spAutoFit/>
+          </a:bodyPr>
+          <a:lstStyle/>
+          <a:p>
+            <a:pPr algn="l">
+              <a:lnSpc>
+                <a:spcPct val="100000"/>
+              </a:lnSpc>
+              <a:spcAft>
+                <a:spcPts val="400"/>
+              </a:spcAft>
+            </a:pPr>
+            <a:r>
+              <a:rPr sz="1150" b="0">
+                <a:solidFill>
+                  <a:srgbClr val="748696"/>
+                </a:solidFill>
+                <a:latin typeface="微软雅黑"/>
+                <a:ea typeface="微软雅黑"/>
+              </a:rPr>
+              <a:t>诚实说明：留一实测比闭式期望(28.8%基线)严峻但结论一致；23.8% 查询因资料不足弃答，不计误命中。</a:t>
+            </a:r>
+          </a:p>
+        </p:txBody>
+      </p:sp>
+    </p:spTree>
+  </p:cSld>
+  <p:clrMapOvr>
+    <a:masterClrMapping/>
+  </p:clrMapOvr>
+</p:sld>
+</file>
+
+<file path=ppt/slides/slide8.xml><?xml version="1.0" encoding="utf-8"?>
+<p:sld xmlns:a="http://schemas.openxmlformats.org/drawingml/2006/main" xmlns:p="http://schemas.openxmlformats.org/presentationml/2006/main" xmlns:r="http://schemas.openxmlformats.org/officeDocument/2006/relationships">
+  <p:cSld>
+    <p:bg>
+      <p:bgPr>
+        <a:solidFill>
+          <a:srgbClr val="121C28"/>
+        </a:solidFill>
+        <a:effectLst/>
+      </p:bgPr>
+    </p:bg>
+    <p:spTree>
+      <p:nvGrpSpPr>
+        <p:cNvPr id="1" name=""/>
+        <p:cNvGrpSpPr/>
+        <p:nvPr/>
+      </p:nvGrpSpPr>
+      <p:grpSpPr/>
+      <p:sp>
+        <p:nvSpPr>
+          <p:cNvPr id="2" name="Rectangle 1"/>
+          <p:cNvSpPr/>
+          <p:nvPr/>
+        </p:nvSpPr>
+        <p:spPr>
+          <a:xfrm>
+            <a:off x="822960" y="658368"/>
+            <a:ext cx="292608" cy="27432"/>
+          </a:xfrm>
+          <a:prstGeom prst="rect">
+            <a:avLst/>
+          </a:prstGeom>
+          <a:solidFill>
+            <a:srgbClr val="35C6BA"/>
+          </a:solidFill>
+          <a:ln>
+            <a:noFill/>
+          </a:ln>
+          <a:effectLst/>
+        </p:spPr>
+        <p:style>
+          <a:lnRef idx="1">
+            <a:schemeClr val="accent1"/>
+          </a:lnRef>
+          <a:fillRef idx="3">
+            <a:schemeClr val="accent1"/>
+          </a:fillRef>
+          <a:effectRef idx="2">
+            <a:schemeClr val="accent1"/>
+          </a:effectRef>
+          <a:fontRef idx="minor">
+            <a:schemeClr val="lt1"/>
+          </a:fontRef>
+        </p:style>
+        <p:txBody>
+          <a:bodyPr rtlCol="0" anchor="ctr"/>
+          <a:lstStyle/>
+          <a:p>
+            <a:pPr algn="ctr"/>
+          </a:p>
+        </p:txBody>
+      </p:sp>
+      <p:sp>
+        <p:nvSpPr>
+          <p:cNvPr id="3" name="TextBox 2"/>
+          <p:cNvSpPr txBox="1"/>
+          <p:nvPr/>
+        </p:nvSpPr>
+        <p:spPr>
+          <a:xfrm>
+            <a:off x="1207008" y="512063"/>
+            <a:ext cx="7315200" cy="320040"/>
+          </a:xfrm>
+          <a:prstGeom prst="rect">
+            <a:avLst/>
+          </a:prstGeom>
+          <a:noFill/>
+        </p:spPr>
+        <p:txBody>
+          <a:bodyPr wrap="square" anchor="t" lIns="0" rIns="0" tIns="0" bIns="0">
+            <a:spAutoFit/>
+          </a:bodyPr>
+          <a:lstStyle/>
+          <a:p>
+            <a:pPr algn="l">
+              <a:lnSpc>
+                <a:spcPct val="100000"/>
+              </a:lnSpc>
+              <a:spcAft>
+                <a:spcPts val="400"/>
+              </a:spcAft>
+            </a:pPr>
+            <a:r>
+              <a:rPr sz="1200" b="1">
+                <a:solidFill>
+                  <a:srgbClr val="35C6BA"/>
+                </a:solidFill>
+                <a:latin typeface="Consolas"/>
+                <a:ea typeface="Consolas"/>
+              </a:rPr>
+              <a:t>07 · 相比流行方法的优势</a:t>
+            </a:r>
+          </a:p>
+        </p:txBody>
+      </p:sp>
+      <p:sp>
+        <p:nvSpPr>
+          <p:cNvPr id="4" name="TextBox 3"/>
+          <p:cNvSpPr txBox="1"/>
+          <p:nvPr/>
+        </p:nvSpPr>
+        <p:spPr>
+          <a:xfrm>
+            <a:off x="822960" y="1005840"/>
+            <a:ext cx="10515600" cy="822960"/>
+          </a:xfrm>
+          <a:prstGeom prst="rect">
+            <a:avLst/>
+          </a:prstGeom>
+          <a:noFill/>
+        </p:spPr>
+        <p:txBody>
+          <a:bodyPr wrap="square" anchor="t" lIns="0" rIns="0" tIns="0" bIns="0">
+            <a:spAutoFit/>
+          </a:bodyPr>
+          <a:lstStyle/>
+          <a:p>
+            <a:pPr algn="l">
+              <a:lnSpc>
+                <a:spcPct val="100000"/>
+              </a:lnSpc>
+              <a:spcAft>
+                <a:spcPts val="400"/>
+              </a:spcAft>
+            </a:pPr>
+            <a:r>
+              <a:rPr sz="2800" b="1">
+                <a:solidFill>
+                  <a:srgbClr val="EAF0F5"/>
+                </a:solidFill>
+                <a:latin typeface="微软雅黑"/>
+                <a:ea typeface="微软雅黑"/>
+              </a:rPr>
+              <a:t>赢在原理与介入时机：检索前的信息论消歧</a:t>
             </a:r>
           </a:p>
         </p:txBody>
@@ -10873,7 +11986,7 @@
                 <a:latin typeface="微软雅黑"/>
                 <a:ea typeface="微软雅黑"/>
               </a:rPr>
-              <a:t>定位：AEG 是更便宜、更透明、更早介入的消歧决策层——零成本信息论标量，在检索前量化'该不该打扰用户'。</a:t>
+              <a:t>原理定位：把消歧从检索后的启发式补救，提前为检索前的信息论门控——用零成本熵标量主动决定'该不该问机型'，而非事后纠错或被动拒答。</a:t>
             </a:r>
           </a:p>
         </p:txBody>
@@ -10886,7 +11999,7 @@
 </p:sld>
 </file>
 
-<file path=ppt/slides/slide8.xml><?xml version="1.0" encoding="utf-8"?>
+<file path=ppt/slides/slide9.xml><?xml version="1.0" encoding="utf-8"?>
 <p:sld xmlns:a="http://schemas.openxmlformats.org/drawingml/2006/main" xmlns:p="http://schemas.openxmlformats.org/presentationml/2006/main" xmlns:r="http://schemas.openxmlformats.org/officeDocument/2006/relationships">
   <p:cSld>
     <p:bg>
@@ -11030,7 +12143,7 @@
                 <a:latin typeface="Consolas"/>
                 <a:ea typeface="Consolas"/>
               </a:rPr>
-              <a:t>07 · 部署与价值</a:t>
+              <a:t>08 · 部署与价值</a:t>
             </a:r>
           </a:p>
         </p:txBody>
